--- a/hallucination/hallucination_paper/fig/approach.pptx
+++ b/hallucination/hallucination_paper/fig/approach.pptx
@@ -4,8 +4,12 @@
   <p:sldMasterIdLst>
     <p:sldMasterId id="2147483648" r:id="rId1"/>
   </p:sldMasterIdLst>
+  <p:notesMasterIdLst>
+    <p:notesMasterId r:id="rId4"/>
+  </p:notesMasterIdLst>
   <p:sldIdLst>
     <p:sldId id="257" r:id="rId2"/>
+    <p:sldId id="266" r:id="rId3"/>
   </p:sldIdLst>
   <p:sldSz cx="12192000" cy="6858000"/>
   <p:notesSz cx="6858000" cy="9144000"/>
@@ -126,6 +130,473 @@
 </p:presentation>
 </file>
 
+<file path=ppt/notesMasters/notesMaster1.xml><?xml version="1.0" encoding="utf-8"?>
+<p:notesMaster xmlns:a="http://schemas.openxmlformats.org/drawingml/2006/main" xmlns:r="http://schemas.openxmlformats.org/officeDocument/2006/relationships" xmlns:p="http://schemas.openxmlformats.org/presentationml/2006/main">
+  <p:cSld>
+    <p:bg>
+      <p:bgRef idx="1001">
+        <a:schemeClr val="bg1"/>
+      </p:bgRef>
+    </p:bg>
+    <p:spTree>
+      <p:nvGrpSpPr>
+        <p:cNvPr id="1" name=""/>
+        <p:cNvGrpSpPr/>
+        <p:nvPr/>
+      </p:nvGrpSpPr>
+      <p:grpSpPr>
+        <a:xfrm>
+          <a:off x="0" y="0"/>
+          <a:ext cx="0" cy="0"/>
+          <a:chOff x="0" y="0"/>
+          <a:chExt cx="0" cy="0"/>
+        </a:xfrm>
+      </p:grpSpPr>
+      <p:sp>
+        <p:nvSpPr>
+          <p:cNvPr id="2" name="Header Placeholder 1"/>
+          <p:cNvSpPr>
+            <a:spLocks noGrp="1"/>
+          </p:cNvSpPr>
+          <p:nvPr>
+            <p:ph type="hdr" sz="quarter"/>
+          </p:nvPr>
+        </p:nvSpPr>
+        <p:spPr>
+          <a:xfrm>
+            <a:off x="0" y="0"/>
+            <a:ext cx="2971800" cy="458788"/>
+          </a:xfrm>
+          <a:prstGeom prst="rect">
+            <a:avLst/>
+          </a:prstGeom>
+        </p:spPr>
+        <p:txBody>
+          <a:bodyPr vert="horz" lIns="91440" tIns="45720" rIns="91440" bIns="45720" rtlCol="0"/>
+          <a:lstStyle>
+            <a:lvl1pPr algn="l">
+              <a:defRPr sz="1200"/>
+            </a:lvl1pPr>
+          </a:lstStyle>
+          <a:p>
+            <a:endParaRPr lang="en-CN"/>
+          </a:p>
+        </p:txBody>
+      </p:sp>
+      <p:sp>
+        <p:nvSpPr>
+          <p:cNvPr id="3" name="Date Placeholder 2"/>
+          <p:cNvSpPr>
+            <a:spLocks noGrp="1"/>
+          </p:cNvSpPr>
+          <p:nvPr>
+            <p:ph type="dt" idx="1"/>
+          </p:nvPr>
+        </p:nvSpPr>
+        <p:spPr>
+          <a:xfrm>
+            <a:off x="3884613" y="0"/>
+            <a:ext cx="2971800" cy="458788"/>
+          </a:xfrm>
+          <a:prstGeom prst="rect">
+            <a:avLst/>
+          </a:prstGeom>
+        </p:spPr>
+        <p:txBody>
+          <a:bodyPr vert="horz" lIns="91440" tIns="45720" rIns="91440" bIns="45720" rtlCol="0"/>
+          <a:lstStyle>
+            <a:lvl1pPr algn="r">
+              <a:defRPr sz="1200"/>
+            </a:lvl1pPr>
+          </a:lstStyle>
+          <a:p>
+            <a:fld id="{B380D578-83B7-F24E-8F0F-318B1ACDC3B3}" type="datetimeFigureOut">
+              <a:rPr lang="en-CN" smtClean="0"/>
+              <a:t>2026/3/8</a:t>
+            </a:fld>
+            <a:endParaRPr lang="en-CN"/>
+          </a:p>
+        </p:txBody>
+      </p:sp>
+      <p:sp>
+        <p:nvSpPr>
+          <p:cNvPr id="4" name="Slide Image Placeholder 3"/>
+          <p:cNvSpPr>
+            <a:spLocks noGrp="1" noRot="1" noChangeAspect="1"/>
+          </p:cNvSpPr>
+          <p:nvPr>
+            <p:ph type="sldImg" idx="2"/>
+          </p:nvPr>
+        </p:nvSpPr>
+        <p:spPr>
+          <a:xfrm>
+            <a:off x="685800" y="1143000"/>
+            <a:ext cx="5486400" cy="3086100"/>
+          </a:xfrm>
+          <a:prstGeom prst="rect">
+            <a:avLst/>
+          </a:prstGeom>
+          <a:noFill/>
+          <a:ln w="12700">
+            <a:solidFill>
+              <a:prstClr val="black"/>
+            </a:solidFill>
+          </a:ln>
+        </p:spPr>
+        <p:txBody>
+          <a:bodyPr vert="horz" lIns="91440" tIns="45720" rIns="91440" bIns="45720" rtlCol="0" anchor="ctr"/>
+          <a:lstStyle/>
+          <a:p>
+            <a:endParaRPr lang="en-CN"/>
+          </a:p>
+        </p:txBody>
+      </p:sp>
+      <p:sp>
+        <p:nvSpPr>
+          <p:cNvPr id="5" name="Notes Placeholder 4"/>
+          <p:cNvSpPr>
+            <a:spLocks noGrp="1"/>
+          </p:cNvSpPr>
+          <p:nvPr>
+            <p:ph type="body" sz="quarter" idx="3"/>
+          </p:nvPr>
+        </p:nvSpPr>
+        <p:spPr>
+          <a:xfrm>
+            <a:off x="685800" y="4400550"/>
+            <a:ext cx="5486400" cy="3600450"/>
+          </a:xfrm>
+          <a:prstGeom prst="rect">
+            <a:avLst/>
+          </a:prstGeom>
+        </p:spPr>
+        <p:txBody>
+          <a:bodyPr vert="horz" lIns="91440" tIns="45720" rIns="91440" bIns="45720" rtlCol="0"/>
+          <a:lstStyle/>
+          <a:p>
+            <a:pPr lvl="0"/>
+            <a:r>
+              <a:rPr lang="en-US"/>
+              <a:t>Click to edit Master text styles</a:t>
+            </a:r>
+          </a:p>
+          <a:p>
+            <a:pPr lvl="1"/>
+            <a:r>
+              <a:rPr lang="en-US"/>
+              <a:t>Second level</a:t>
+            </a:r>
+          </a:p>
+          <a:p>
+            <a:pPr lvl="2"/>
+            <a:r>
+              <a:rPr lang="en-US"/>
+              <a:t>Third level</a:t>
+            </a:r>
+          </a:p>
+          <a:p>
+            <a:pPr lvl="3"/>
+            <a:r>
+              <a:rPr lang="en-US"/>
+              <a:t>Fourth level</a:t>
+            </a:r>
+          </a:p>
+          <a:p>
+            <a:pPr lvl="4"/>
+            <a:r>
+              <a:rPr lang="en-US"/>
+              <a:t>Fifth level</a:t>
+            </a:r>
+            <a:endParaRPr lang="en-CN"/>
+          </a:p>
+        </p:txBody>
+      </p:sp>
+      <p:sp>
+        <p:nvSpPr>
+          <p:cNvPr id="6" name="Footer Placeholder 5"/>
+          <p:cNvSpPr>
+            <a:spLocks noGrp="1"/>
+          </p:cNvSpPr>
+          <p:nvPr>
+            <p:ph type="ftr" sz="quarter" idx="4"/>
+          </p:nvPr>
+        </p:nvSpPr>
+        <p:spPr>
+          <a:xfrm>
+            <a:off x="0" y="8685213"/>
+            <a:ext cx="2971800" cy="458787"/>
+          </a:xfrm>
+          <a:prstGeom prst="rect">
+            <a:avLst/>
+          </a:prstGeom>
+        </p:spPr>
+        <p:txBody>
+          <a:bodyPr vert="horz" lIns="91440" tIns="45720" rIns="91440" bIns="45720" rtlCol="0" anchor="b"/>
+          <a:lstStyle>
+            <a:lvl1pPr algn="l">
+              <a:defRPr sz="1200"/>
+            </a:lvl1pPr>
+          </a:lstStyle>
+          <a:p>
+            <a:endParaRPr lang="en-CN"/>
+          </a:p>
+        </p:txBody>
+      </p:sp>
+      <p:sp>
+        <p:nvSpPr>
+          <p:cNvPr id="7" name="Slide Number Placeholder 6"/>
+          <p:cNvSpPr>
+            <a:spLocks noGrp="1"/>
+          </p:cNvSpPr>
+          <p:nvPr>
+            <p:ph type="sldNum" sz="quarter" idx="5"/>
+          </p:nvPr>
+        </p:nvSpPr>
+        <p:spPr>
+          <a:xfrm>
+            <a:off x="3884613" y="8685213"/>
+            <a:ext cx="2971800" cy="458787"/>
+          </a:xfrm>
+          <a:prstGeom prst="rect">
+            <a:avLst/>
+          </a:prstGeom>
+        </p:spPr>
+        <p:txBody>
+          <a:bodyPr vert="horz" lIns="91440" tIns="45720" rIns="91440" bIns="45720" rtlCol="0" anchor="b"/>
+          <a:lstStyle>
+            <a:lvl1pPr algn="r">
+              <a:defRPr sz="1200"/>
+            </a:lvl1pPr>
+          </a:lstStyle>
+          <a:p>
+            <a:fld id="{8AEC507E-ED11-5541-AC6C-3DB8072D0345}" type="slidenum">
+              <a:rPr lang="en-CN" smtClean="0"/>
+              <a:t>‹#›</a:t>
+            </a:fld>
+            <a:endParaRPr lang="en-CN"/>
+          </a:p>
+        </p:txBody>
+      </p:sp>
+    </p:spTree>
+    <p:extLst>
+      <p:ext uri="{BB962C8B-B14F-4D97-AF65-F5344CB8AC3E}">
+        <p14:creationId xmlns:p14="http://schemas.microsoft.com/office/powerpoint/2010/main" val="1238905010"/>
+      </p:ext>
+    </p:extLst>
+  </p:cSld>
+  <p:clrMap bg1="lt1" tx1="dk1" bg2="lt2" tx2="dk2" accent1="accent1" accent2="accent2" accent3="accent3" accent4="accent4" accent5="accent5" accent6="accent6" hlink="hlink" folHlink="folHlink"/>
+  <p:notesStyle>
+    <a:lvl1pPr marL="0" algn="l" defTabSz="914400" rtl="0" eaLnBrk="1" latinLnBrk="0" hangingPunct="1">
+      <a:defRPr sz="1200" kern="1200">
+        <a:solidFill>
+          <a:schemeClr val="tx1"/>
+        </a:solidFill>
+        <a:latin typeface="+mn-lt"/>
+        <a:ea typeface="+mn-ea"/>
+        <a:cs typeface="+mn-cs"/>
+      </a:defRPr>
+    </a:lvl1pPr>
+    <a:lvl2pPr marL="457200" algn="l" defTabSz="914400" rtl="0" eaLnBrk="1" latinLnBrk="0" hangingPunct="1">
+      <a:defRPr sz="1200" kern="1200">
+        <a:solidFill>
+          <a:schemeClr val="tx1"/>
+        </a:solidFill>
+        <a:latin typeface="+mn-lt"/>
+        <a:ea typeface="+mn-ea"/>
+        <a:cs typeface="+mn-cs"/>
+      </a:defRPr>
+    </a:lvl2pPr>
+    <a:lvl3pPr marL="914400" algn="l" defTabSz="914400" rtl="0" eaLnBrk="1" latinLnBrk="0" hangingPunct="1">
+      <a:defRPr sz="1200" kern="1200">
+        <a:solidFill>
+          <a:schemeClr val="tx1"/>
+        </a:solidFill>
+        <a:latin typeface="+mn-lt"/>
+        <a:ea typeface="+mn-ea"/>
+        <a:cs typeface="+mn-cs"/>
+      </a:defRPr>
+    </a:lvl3pPr>
+    <a:lvl4pPr marL="1371600" algn="l" defTabSz="914400" rtl="0" eaLnBrk="1" latinLnBrk="0" hangingPunct="1">
+      <a:defRPr sz="1200" kern="1200">
+        <a:solidFill>
+          <a:schemeClr val="tx1"/>
+        </a:solidFill>
+        <a:latin typeface="+mn-lt"/>
+        <a:ea typeface="+mn-ea"/>
+        <a:cs typeface="+mn-cs"/>
+      </a:defRPr>
+    </a:lvl4pPr>
+    <a:lvl5pPr marL="1828800" algn="l" defTabSz="914400" rtl="0" eaLnBrk="1" latinLnBrk="0" hangingPunct="1">
+      <a:defRPr sz="1200" kern="1200">
+        <a:solidFill>
+          <a:schemeClr val="tx1"/>
+        </a:solidFill>
+        <a:latin typeface="+mn-lt"/>
+        <a:ea typeface="+mn-ea"/>
+        <a:cs typeface="+mn-cs"/>
+      </a:defRPr>
+    </a:lvl5pPr>
+    <a:lvl6pPr marL="2286000" algn="l" defTabSz="914400" rtl="0" eaLnBrk="1" latinLnBrk="0" hangingPunct="1">
+      <a:defRPr sz="1200" kern="1200">
+        <a:solidFill>
+          <a:schemeClr val="tx1"/>
+        </a:solidFill>
+        <a:latin typeface="+mn-lt"/>
+        <a:ea typeface="+mn-ea"/>
+        <a:cs typeface="+mn-cs"/>
+      </a:defRPr>
+    </a:lvl6pPr>
+    <a:lvl7pPr marL="2743200" algn="l" defTabSz="914400" rtl="0" eaLnBrk="1" latinLnBrk="0" hangingPunct="1">
+      <a:defRPr sz="1200" kern="1200">
+        <a:solidFill>
+          <a:schemeClr val="tx1"/>
+        </a:solidFill>
+        <a:latin typeface="+mn-lt"/>
+        <a:ea typeface="+mn-ea"/>
+        <a:cs typeface="+mn-cs"/>
+      </a:defRPr>
+    </a:lvl7pPr>
+    <a:lvl8pPr marL="3200400" algn="l" defTabSz="914400" rtl="0" eaLnBrk="1" latinLnBrk="0" hangingPunct="1">
+      <a:defRPr sz="1200" kern="1200">
+        <a:solidFill>
+          <a:schemeClr val="tx1"/>
+        </a:solidFill>
+        <a:latin typeface="+mn-lt"/>
+        <a:ea typeface="+mn-ea"/>
+        <a:cs typeface="+mn-cs"/>
+      </a:defRPr>
+    </a:lvl8pPr>
+    <a:lvl9pPr marL="3657600" algn="l" defTabSz="914400" rtl="0" eaLnBrk="1" latinLnBrk="0" hangingPunct="1">
+      <a:defRPr sz="1200" kern="1200">
+        <a:solidFill>
+          <a:schemeClr val="tx1"/>
+        </a:solidFill>
+        <a:latin typeface="+mn-lt"/>
+        <a:ea typeface="+mn-ea"/>
+        <a:cs typeface="+mn-cs"/>
+      </a:defRPr>
+    </a:lvl9pPr>
+  </p:notesStyle>
+</p:notesMaster>
+</file>
+
+<file path=ppt/notesSlides/notesSlide1.xml><?xml version="1.0" encoding="utf-8"?>
+<p:notes xmlns:a="http://schemas.openxmlformats.org/drawingml/2006/main" xmlns:r="http://schemas.openxmlformats.org/officeDocument/2006/relationships" xmlns:p="http://schemas.openxmlformats.org/presentationml/2006/main">
+  <p:cSld>
+    <p:spTree>
+      <p:nvGrpSpPr>
+        <p:cNvPr id="1" name=""/>
+        <p:cNvGrpSpPr/>
+        <p:nvPr/>
+      </p:nvGrpSpPr>
+      <p:grpSpPr>
+        <a:xfrm>
+          <a:off x="0" y="0"/>
+          <a:ext cx="0" cy="0"/>
+          <a:chOff x="0" y="0"/>
+          <a:chExt cx="0" cy="0"/>
+        </a:xfrm>
+      </p:grpSpPr>
+      <p:sp>
+        <p:nvSpPr>
+          <p:cNvPr id="2" name="Slide Image Placeholder 1"/>
+          <p:cNvSpPr>
+            <a:spLocks noGrp="1" noRot="1" noChangeAspect="1"/>
+          </p:cNvSpPr>
+          <p:nvPr>
+            <p:ph type="sldImg"/>
+          </p:nvPr>
+        </p:nvSpPr>
+        <p:spPr>
+          <a:xfrm>
+            <a:off x="685800" y="1143000"/>
+            <a:ext cx="5486400" cy="3086100"/>
+          </a:xfrm>
+        </p:spPr>
+      </p:sp>
+      <p:sp>
+        <p:nvSpPr>
+          <p:cNvPr id="3" name="Notes Placeholder 2"/>
+          <p:cNvSpPr>
+            <a:spLocks noGrp="1"/>
+          </p:cNvSpPr>
+          <p:nvPr>
+            <p:ph type="body" idx="1"/>
+          </p:nvPr>
+        </p:nvSpPr>
+        <p:spPr/>
+        <p:txBody>
+          <a:bodyPr/>
+          <a:lstStyle/>
+          <a:p>
+            <a:r>
+              <a:rPr lang="en-GB" dirty="0"/>
+              <a:t>https://</a:t>
+            </a:r>
+            <a:r>
+              <a:rPr lang="en-GB" dirty="0" err="1"/>
+              <a:t>github.com</a:t>
+            </a:r>
+            <a:r>
+              <a:rPr lang="en-GB" dirty="0"/>
+              <a:t>/</a:t>
+            </a:r>
+            <a:r>
+              <a:rPr lang="en-GB" dirty="0" err="1"/>
+              <a:t>zcaceres</a:t>
+            </a:r>
+            <a:r>
+              <a:rPr lang="en-GB" dirty="0"/>
+              <a:t>/</a:t>
+            </a:r>
+            <a:r>
+              <a:rPr lang="en-GB" dirty="0" err="1"/>
+              <a:t>markdownify-mcp</a:t>
+            </a:r>
+            <a:r>
+              <a:rPr lang="en-GB" dirty="0"/>
+              <a:t>/commit/0284aa8f34d32c65e20d8cda2d429b7943c9af03</a:t>
+            </a:r>
+            <a:endParaRPr lang="en-CN" dirty="0"/>
+          </a:p>
+        </p:txBody>
+      </p:sp>
+      <p:sp>
+        <p:nvSpPr>
+          <p:cNvPr id="4" name="Slide Number Placeholder 3"/>
+          <p:cNvSpPr>
+            <a:spLocks noGrp="1"/>
+          </p:cNvSpPr>
+          <p:nvPr>
+            <p:ph type="sldNum" sz="quarter" idx="5"/>
+          </p:nvPr>
+        </p:nvSpPr>
+        <p:spPr/>
+        <p:txBody>
+          <a:bodyPr/>
+          <a:lstStyle/>
+          <a:p>
+            <a:fld id="{A6837353-30EB-4A48-80EB-173D804AEFBD}" type="slidenum">
+              <a:rPr lang="zh-CN" altLang="en-US" smtClean="0"/>
+              <a:t>2</a:t>
+            </a:fld>
+            <a:endParaRPr lang="zh-CN" altLang="en-US"/>
+          </a:p>
+        </p:txBody>
+      </p:sp>
+    </p:spTree>
+    <p:extLst>
+      <p:ext uri="{BB962C8B-B14F-4D97-AF65-F5344CB8AC3E}">
+        <p14:creationId xmlns:p14="http://schemas.microsoft.com/office/powerpoint/2010/main" val="2089162214"/>
+      </p:ext>
+    </p:extLst>
+  </p:cSld>
+  <p:clrMapOvr>
+    <a:masterClrMapping/>
+  </p:clrMapOvr>
+</p:notes>
+</file>
+
 <file path=ppt/slideLayouts/slideLayout1.xml><?xml version="1.0" encoding="utf-8"?>
 <p:sldLayout xmlns:a="http://schemas.openxmlformats.org/drawingml/2006/main" xmlns:r="http://schemas.openxmlformats.org/officeDocument/2006/relationships" xmlns:p="http://schemas.openxmlformats.org/presentationml/2006/main" type="title" preserve="1">
   <p:cSld name="标题幻灯片">
@@ -271,7 +742,7 @@
           <a:p>
             <a:fld id="{760FBDFE-C587-4B4C-A407-44438C67B59E}" type="datetimeFigureOut">
               <a:rPr lang="zh-CN" altLang="en-US" smtClean="0"/>
-              <a:t>2025/9/2</a:t>
+              <a:t>2026/3/8</a:t>
             </a:fld>
             <a:endParaRPr lang="zh-CN" altLang="en-US"/>
           </a:p>
@@ -370,7 +841,7 @@
           <a:p>
             <a:fld id="{760FBDFE-C587-4B4C-A407-44438C67B59E}" type="datetimeFigureOut">
               <a:rPr lang="zh-CN" altLang="en-US" smtClean="0"/>
-              <a:t>2025/9/2</a:t>
+              <a:t>2026/3/8</a:t>
             </a:fld>
             <a:endParaRPr lang="zh-CN" altLang="en-US"/>
           </a:p>
@@ -528,7 +999,7 @@
           <a:p>
             <a:fld id="{760FBDFE-C587-4B4C-A407-44438C67B59E}" type="datetimeFigureOut">
               <a:rPr lang="zh-CN" altLang="en-US" smtClean="0"/>
-              <a:t>2025/9/2</a:t>
+              <a:t>2026/3/8</a:t>
             </a:fld>
             <a:endParaRPr lang="zh-CN" altLang="en-US"/>
           </a:p>
@@ -799,7 +1270,7 @@
           <a:p>
             <a:fld id="{760FBDFE-C587-4B4C-A407-44438C67B59E}" type="datetimeFigureOut">
               <a:rPr lang="zh-CN" altLang="en-US" smtClean="0"/>
-              <a:t>2025/9/2</a:t>
+              <a:t>2026/3/8</a:t>
             </a:fld>
             <a:endParaRPr lang="zh-CN" altLang="en-US"/>
           </a:p>
@@ -1059,7 +1530,7 @@
           <a:p>
             <a:fld id="{760FBDFE-C587-4B4C-A407-44438C67B59E}" type="datetimeFigureOut">
               <a:rPr lang="zh-CN" altLang="en-US" smtClean="0"/>
-              <a:t>2025/9/2</a:t>
+              <a:t>2026/3/8</a:t>
             </a:fld>
             <a:endParaRPr lang="zh-CN" altLang="en-US"/>
           </a:p>
@@ -1313,7 +1784,7 @@
           <a:p>
             <a:fld id="{760FBDFE-C587-4B4C-A407-44438C67B59E}" type="datetimeFigureOut">
               <a:rPr lang="zh-CN" altLang="en-US" smtClean="0"/>
-              <a:t>2025/9/2</a:t>
+              <a:t>2026/3/8</a:t>
             </a:fld>
             <a:endParaRPr lang="zh-CN" altLang="en-US"/>
           </a:p>
@@ -1727,7 +2198,7 @@
           <a:p>
             <a:fld id="{760FBDFE-C587-4B4C-A407-44438C67B59E}" type="datetimeFigureOut">
               <a:rPr lang="zh-CN" altLang="en-US" smtClean="0"/>
-              <a:t>2025/9/2</a:t>
+              <a:t>2026/3/8</a:t>
             </a:fld>
             <a:endParaRPr lang="zh-CN" altLang="en-US"/>
           </a:p>
@@ -1859,7 +2330,7 @@
           <a:p>
             <a:fld id="{760FBDFE-C587-4B4C-A407-44438C67B59E}" type="datetimeFigureOut">
               <a:rPr lang="zh-CN" altLang="en-US" smtClean="0"/>
-              <a:t>2025/9/2</a:t>
+              <a:t>2026/3/8</a:t>
             </a:fld>
             <a:endParaRPr lang="zh-CN" altLang="en-US"/>
           </a:p>
@@ -1958,7 +2429,7 @@
           <a:p>
             <a:fld id="{760FBDFE-C587-4B4C-A407-44438C67B59E}" type="datetimeFigureOut">
               <a:rPr lang="zh-CN" altLang="en-US" smtClean="0"/>
-              <a:t>2025/9/2</a:t>
+              <a:t>2026/3/8</a:t>
             </a:fld>
             <a:endParaRPr lang="zh-CN" altLang="en-US"/>
           </a:p>
@@ -2130,7 +2601,7 @@
           <a:p>
             <a:fld id="{9EFD9D74-47D9-4702-A33C-335B63B48DBF}" type="datetimeFigureOut">
               <a:rPr lang="zh-CN" altLang="en-US" smtClean="0"/>
-              <a:t>2025/9/2</a:t>
+              <a:t>2026/3/8</a:t>
             </a:fld>
             <a:endParaRPr lang="zh-CN" altLang="en-US" dirty="0"/>
           </a:p>
@@ -2370,7 +2841,7 @@
           <a:p>
             <a:fld id="{760FBDFE-C587-4B4C-A407-44438C67B59E}" type="datetimeFigureOut">
               <a:rPr lang="zh-CN" altLang="en-US" smtClean="0"/>
-              <a:t>2025/9/2</a:t>
+              <a:t>2026/3/8</a:t>
             </a:fld>
             <a:endParaRPr lang="zh-CN" altLang="en-US"/>
           </a:p>
@@ -2593,7 +3064,7 @@
           <a:p>
             <a:fld id="{760FBDFE-C587-4B4C-A407-44438C67B59E}" type="datetimeFigureOut">
               <a:rPr lang="zh-CN" altLang="en-US" smtClean="0"/>
-              <a:t>2025/9/2</a:t>
+              <a:t>2026/3/8</a:t>
             </a:fld>
             <a:endParaRPr lang="zh-CN" altLang="en-US"/>
           </a:p>
@@ -8929,6 +9400,1689 @@
           <a:p>
             <a:pPr algn="ctr"/>
             <a:endParaRPr lang="zh-CN" altLang="en-US"/>
+          </a:p>
+        </p:txBody>
+      </p:sp>
+    </p:spTree>
+    <p:custDataLst>
+      <p:tags r:id="rId1"/>
+    </p:custDataLst>
+  </p:cSld>
+  <p:clrMapOvr>
+    <a:masterClrMapping/>
+  </p:clrMapOvr>
+</p:sld>
+</file>
+
+<file path=ppt/slides/slide2.xml><?xml version="1.0" encoding="utf-8"?>
+<p:sld xmlns:a="http://schemas.openxmlformats.org/drawingml/2006/main" xmlns:r="http://schemas.openxmlformats.org/officeDocument/2006/relationships" xmlns:p="http://schemas.openxmlformats.org/presentationml/2006/main">
+  <p:cSld>
+    <p:spTree>
+      <p:nvGrpSpPr>
+        <p:cNvPr id="1" name=""/>
+        <p:cNvGrpSpPr/>
+        <p:nvPr/>
+      </p:nvGrpSpPr>
+      <p:grpSpPr>
+        <a:xfrm>
+          <a:off x="0" y="0"/>
+          <a:ext cx="0" cy="0"/>
+          <a:chOff x="0" y="0"/>
+          <a:chExt cx="0" cy="0"/>
+        </a:xfrm>
+      </p:grpSpPr>
+      <p:sp>
+        <p:nvSpPr>
+          <p:cNvPr id="2" name="bg1"/>
+          <p:cNvSpPr/>
+          <p:nvPr/>
+        </p:nvSpPr>
+        <p:spPr>
+          <a:xfrm>
+            <a:off x="2547568" y="456677"/>
+            <a:ext cx="4146694" cy="1680653"/>
+          </a:xfrm>
+          <a:prstGeom prst="rect">
+            <a:avLst/>
+          </a:prstGeom>
+          <a:noFill/>
+          <a:ln w="19050">
+            <a:solidFill>
+              <a:schemeClr val="tx1"/>
+            </a:solidFill>
+          </a:ln>
+        </p:spPr>
+        <p:style>
+          <a:lnRef idx="2">
+            <a:schemeClr val="accent1">
+              <a:shade val="15000"/>
+            </a:schemeClr>
+          </a:lnRef>
+          <a:fillRef idx="1">
+            <a:schemeClr val="accent1"/>
+          </a:fillRef>
+          <a:effectRef idx="0">
+            <a:schemeClr val="accent1"/>
+          </a:effectRef>
+          <a:fontRef idx="minor">
+            <a:schemeClr val="lt1"/>
+          </a:fontRef>
+        </p:style>
+        <p:txBody>
+          <a:bodyPr rtlCol="0" anchor="ctr"/>
+          <a:lstStyle/>
+          <a:p>
+            <a:pPr algn="ctr"/>
+            <a:endParaRPr lang="en-US" sz="878"/>
+          </a:p>
+        </p:txBody>
+      </p:sp>
+      <p:sp>
+        <p:nvSpPr>
+          <p:cNvPr id="3" name="bg1text"/>
+          <p:cNvSpPr txBox="1"/>
+          <p:nvPr/>
+        </p:nvSpPr>
+        <p:spPr>
+          <a:xfrm>
+            <a:off x="2547568" y="456675"/>
+            <a:ext cx="3954879" cy="1983748"/>
+          </a:xfrm>
+          <a:prstGeom prst="rect">
+            <a:avLst/>
+          </a:prstGeom>
+          <a:noFill/>
+        </p:spPr>
+        <p:txBody>
+          <a:bodyPr wrap="square" rtlCol="0">
+            <a:spAutoFit/>
+          </a:bodyPr>
+          <a:lstStyle/>
+          <a:p>
+            <a:r>
+              <a:rPr lang="en-GB" sz="878" dirty="0">
+                <a:solidFill>
+                  <a:srgbClr val="AF00DB"/>
+                </a:solidFill>
+                <a:latin typeface="Consolas" panose="020B0609020204030204" pitchFamily="49" charset="0"/>
+                <a:cs typeface="Consolas" panose="020B0609020204030204" pitchFamily="49" charset="0"/>
+              </a:rPr>
+              <a:t>export</a:t>
+            </a:r>
+            <a:r>
+              <a:rPr lang="en-GB" sz="878" dirty="0">
+                <a:solidFill>
+                  <a:srgbClr val="3B3B3B"/>
+                </a:solidFill>
+                <a:latin typeface="Consolas" panose="020B0609020204030204" pitchFamily="49" charset="0"/>
+                <a:cs typeface="Consolas" panose="020B0609020204030204" pitchFamily="49" charset="0"/>
+              </a:rPr>
+              <a:t> </a:t>
+            </a:r>
+            <a:r>
+              <a:rPr lang="en-GB" sz="878" dirty="0" err="1">
+                <a:solidFill>
+                  <a:srgbClr val="001080"/>
+                </a:solidFill>
+                <a:latin typeface="Consolas" panose="020B0609020204030204" pitchFamily="49" charset="0"/>
+                <a:cs typeface="Consolas" panose="020B0609020204030204" pitchFamily="49" charset="0"/>
+              </a:rPr>
+              <a:t>constWebpageToMarkdownTool</a:t>
+            </a:r>
+            <a:r>
+              <a:rPr lang="en-GB" sz="878" dirty="0">
+                <a:solidFill>
+                  <a:srgbClr val="3B3B3B"/>
+                </a:solidFill>
+                <a:latin typeface="Consolas" panose="020B0609020204030204" pitchFamily="49" charset="0"/>
+                <a:cs typeface="Consolas" panose="020B0609020204030204" pitchFamily="49" charset="0"/>
+              </a:rPr>
+              <a:t> = </a:t>
+            </a:r>
+          </a:p>
+          <a:p>
+            <a:r>
+              <a:rPr lang="en-GB" sz="878" dirty="0">
+                <a:solidFill>
+                  <a:srgbClr val="001080"/>
+                </a:solidFill>
+                <a:latin typeface="Consolas" panose="020B0609020204030204" pitchFamily="49" charset="0"/>
+                <a:cs typeface="Consolas" panose="020B0609020204030204" pitchFamily="49" charset="0"/>
+              </a:rPr>
+              <a:t>  </a:t>
+            </a:r>
+            <a:r>
+              <a:rPr lang="en-GB" sz="878" dirty="0" err="1">
+                <a:solidFill>
+                  <a:srgbClr val="001080"/>
+                </a:solidFill>
+                <a:latin typeface="Consolas" panose="020B0609020204030204" pitchFamily="49" charset="0"/>
+                <a:cs typeface="Consolas" panose="020B0609020204030204" pitchFamily="49" charset="0"/>
+              </a:rPr>
+              <a:t>ToolSchema</a:t>
+            </a:r>
+            <a:r>
+              <a:rPr lang="en-GB" sz="878" dirty="0" err="1">
+                <a:solidFill>
+                  <a:srgbClr val="3B3B3B"/>
+                </a:solidFill>
+                <a:latin typeface="Consolas" panose="020B0609020204030204" pitchFamily="49" charset="0"/>
+                <a:cs typeface="Consolas" panose="020B0609020204030204" pitchFamily="49" charset="0"/>
+              </a:rPr>
+              <a:t>.</a:t>
+            </a:r>
+            <a:r>
+              <a:rPr lang="en-GB" sz="878" dirty="0" err="1">
+                <a:solidFill>
+                  <a:srgbClr val="795E26"/>
+                </a:solidFill>
+                <a:latin typeface="Consolas" panose="020B0609020204030204" pitchFamily="49" charset="0"/>
+                <a:cs typeface="Consolas" panose="020B0609020204030204" pitchFamily="49" charset="0"/>
+              </a:rPr>
+              <a:t>parse</a:t>
+            </a:r>
+            <a:r>
+              <a:rPr lang="en-GB" sz="878" dirty="0">
+                <a:solidFill>
+                  <a:srgbClr val="3B3B3B"/>
+                </a:solidFill>
+                <a:latin typeface="Consolas" panose="020B0609020204030204" pitchFamily="49" charset="0"/>
+                <a:cs typeface="Consolas" panose="020B0609020204030204" pitchFamily="49" charset="0"/>
+              </a:rPr>
+              <a:t>({</a:t>
+            </a:r>
+          </a:p>
+          <a:p>
+            <a:r>
+              <a:rPr lang="en-GB" sz="878" dirty="0">
+                <a:solidFill>
+                  <a:srgbClr val="001080"/>
+                </a:solidFill>
+                <a:latin typeface="Consolas" panose="020B0609020204030204" pitchFamily="49" charset="0"/>
+                <a:cs typeface="Consolas" panose="020B0609020204030204" pitchFamily="49" charset="0"/>
+              </a:rPr>
+              <a:t>  </a:t>
+            </a:r>
+            <a:r>
+              <a:rPr lang="en-GB" sz="878" dirty="0" err="1">
+                <a:solidFill>
+                  <a:srgbClr val="001080"/>
+                </a:solidFill>
+                <a:latin typeface="Consolas" panose="020B0609020204030204" pitchFamily="49" charset="0"/>
+                <a:cs typeface="Consolas" panose="020B0609020204030204" pitchFamily="49" charset="0"/>
+              </a:rPr>
+              <a:t>name:</a:t>
+            </a:r>
+            <a:r>
+              <a:rPr lang="en-GB" sz="878" dirty="0" err="1">
+                <a:solidFill>
+                  <a:srgbClr val="3B3B3B"/>
+                </a:solidFill>
+                <a:latin typeface="Consolas" panose="020B0609020204030204" pitchFamily="49" charset="0"/>
+                <a:cs typeface="Consolas" panose="020B0609020204030204" pitchFamily="49" charset="0"/>
+              </a:rPr>
+              <a:t>"</a:t>
+            </a:r>
+            <a:r>
+              <a:rPr lang="en-GB" sz="878" dirty="0" err="1">
+                <a:solidFill>
+                  <a:srgbClr val="A31515"/>
+                </a:solidFill>
+                <a:latin typeface="Consolas" panose="020B0609020204030204" pitchFamily="49" charset="0"/>
+                <a:cs typeface="Consolas" panose="020B0609020204030204" pitchFamily="49" charset="0"/>
+              </a:rPr>
+              <a:t>webpage-to-markdown</a:t>
+            </a:r>
+            <a:r>
+              <a:rPr lang="en-GB" sz="878" dirty="0">
+                <a:solidFill>
+                  <a:srgbClr val="3B3B3B"/>
+                </a:solidFill>
+                <a:latin typeface="Consolas" panose="020B0609020204030204" pitchFamily="49" charset="0"/>
+                <a:cs typeface="Consolas" panose="020B0609020204030204" pitchFamily="49" charset="0"/>
+              </a:rPr>
+              <a:t>",</a:t>
+            </a:r>
+          </a:p>
+          <a:p>
+            <a:r>
+              <a:rPr lang="en-GB" sz="878" dirty="0">
+                <a:solidFill>
+                  <a:srgbClr val="001080"/>
+                </a:solidFill>
+                <a:latin typeface="Consolas" panose="020B0609020204030204" pitchFamily="49" charset="0"/>
+                <a:cs typeface="Consolas" panose="020B0609020204030204" pitchFamily="49" charset="0"/>
+              </a:rPr>
+              <a:t>  </a:t>
+            </a:r>
+            <a:r>
+              <a:rPr lang="en-GB" sz="878" dirty="0" err="1">
+                <a:solidFill>
+                  <a:srgbClr val="001080"/>
+                </a:solidFill>
+                <a:latin typeface="Consolas" panose="020B0609020204030204" pitchFamily="49" charset="0"/>
+                <a:cs typeface="Consolas" panose="020B0609020204030204" pitchFamily="49" charset="0"/>
+              </a:rPr>
+              <a:t>description:</a:t>
+            </a:r>
+            <a:r>
+              <a:rPr lang="en-GB" sz="878" dirty="0" err="1">
+                <a:solidFill>
+                  <a:srgbClr val="3B3B3B"/>
+                </a:solidFill>
+                <a:latin typeface="Consolas" panose="020B0609020204030204" pitchFamily="49" charset="0"/>
+                <a:cs typeface="Consolas" panose="020B0609020204030204" pitchFamily="49" charset="0"/>
+              </a:rPr>
+              <a:t>"</a:t>
+            </a:r>
+            <a:r>
+              <a:rPr lang="en-GB" sz="878" dirty="0" err="1">
+                <a:solidFill>
+                  <a:srgbClr val="A31515"/>
+                </a:solidFill>
+                <a:latin typeface="Consolas" panose="020B0609020204030204" pitchFamily="49" charset="0"/>
+                <a:cs typeface="Consolas" panose="020B0609020204030204" pitchFamily="49" charset="0"/>
+              </a:rPr>
+              <a:t>Convert</a:t>
+            </a:r>
+            <a:r>
+              <a:rPr lang="en-GB" sz="878" dirty="0">
+                <a:solidFill>
+                  <a:srgbClr val="A31515"/>
+                </a:solidFill>
+                <a:latin typeface="Consolas" panose="020B0609020204030204" pitchFamily="49" charset="0"/>
+                <a:cs typeface="Consolas" panose="020B0609020204030204" pitchFamily="49" charset="0"/>
+              </a:rPr>
+              <a:t> a webpage to markdown</a:t>
+            </a:r>
+            <a:r>
+              <a:rPr lang="en-GB" sz="878" dirty="0">
+                <a:solidFill>
+                  <a:srgbClr val="3B3B3B"/>
+                </a:solidFill>
+                <a:latin typeface="Consolas" panose="020B0609020204030204" pitchFamily="49" charset="0"/>
+                <a:cs typeface="Consolas" panose="020B0609020204030204" pitchFamily="49" charset="0"/>
+              </a:rPr>
+              <a:t>"，</a:t>
+            </a:r>
+          </a:p>
+          <a:p>
+            <a:r>
+              <a:rPr lang="en-GB" sz="878" dirty="0">
+                <a:solidFill>
+                  <a:srgbClr val="001080"/>
+                </a:solidFill>
+                <a:latin typeface="Consolas" panose="020B0609020204030204" pitchFamily="49" charset="0"/>
+                <a:cs typeface="Consolas" panose="020B0609020204030204" pitchFamily="49" charset="0"/>
+              </a:rPr>
+              <a:t>  </a:t>
+            </a:r>
+            <a:r>
+              <a:rPr lang="en-GB" sz="878" dirty="0" err="1">
+                <a:solidFill>
+                  <a:srgbClr val="001080"/>
+                </a:solidFill>
+                <a:latin typeface="Consolas" panose="020B0609020204030204" pitchFamily="49" charset="0"/>
+                <a:cs typeface="Consolas" panose="020B0609020204030204" pitchFamily="49" charset="0"/>
+              </a:rPr>
+              <a:t>inputSchema</a:t>
+            </a:r>
+            <a:r>
+              <a:rPr lang="en-GB" sz="878" dirty="0">
+                <a:solidFill>
+                  <a:srgbClr val="3B3B3B"/>
+                </a:solidFill>
+                <a:latin typeface="Consolas" panose="020B0609020204030204" pitchFamily="49" charset="0"/>
+                <a:cs typeface="Consolas" panose="020B0609020204030204" pitchFamily="49" charset="0"/>
+              </a:rPr>
+              <a:t>: {</a:t>
+            </a:r>
+          </a:p>
+          <a:p>
+            <a:r>
+              <a:rPr lang="en-GB" sz="878" dirty="0">
+                <a:solidFill>
+                  <a:srgbClr val="001080"/>
+                </a:solidFill>
+                <a:latin typeface="Consolas" panose="020B0609020204030204" pitchFamily="49" charset="0"/>
+                <a:cs typeface="Consolas" panose="020B0609020204030204" pitchFamily="49" charset="0"/>
+              </a:rPr>
+              <a:t>    </a:t>
+            </a:r>
+            <a:r>
+              <a:rPr lang="en-GB" sz="878" dirty="0" err="1">
+                <a:solidFill>
+                  <a:srgbClr val="001080"/>
+                </a:solidFill>
+                <a:latin typeface="Consolas" panose="020B0609020204030204" pitchFamily="49" charset="0"/>
+                <a:cs typeface="Consolas" panose="020B0609020204030204" pitchFamily="49" charset="0"/>
+              </a:rPr>
+              <a:t>type:</a:t>
+            </a:r>
+            <a:r>
+              <a:rPr lang="en-GB" sz="878" dirty="0" err="1">
+                <a:solidFill>
+                  <a:srgbClr val="3B3B3B"/>
+                </a:solidFill>
+                <a:latin typeface="Consolas" panose="020B0609020204030204" pitchFamily="49" charset="0"/>
+                <a:cs typeface="Consolas" panose="020B0609020204030204" pitchFamily="49" charset="0"/>
+              </a:rPr>
+              <a:t>"</a:t>
+            </a:r>
+            <a:r>
+              <a:rPr lang="en-GB" sz="878" dirty="0" err="1">
+                <a:solidFill>
+                  <a:srgbClr val="A31515"/>
+                </a:solidFill>
+                <a:latin typeface="Consolas" panose="020B0609020204030204" pitchFamily="49" charset="0"/>
+                <a:cs typeface="Consolas" panose="020B0609020204030204" pitchFamily="49" charset="0"/>
+              </a:rPr>
+              <a:t>object</a:t>
+            </a:r>
+            <a:r>
+              <a:rPr lang="en-GB" sz="878" dirty="0">
+                <a:solidFill>
+                  <a:srgbClr val="3B3B3B"/>
+                </a:solidFill>
+                <a:latin typeface="Consolas" panose="020B0609020204030204" pitchFamily="49" charset="0"/>
+                <a:cs typeface="Consolas" panose="020B0609020204030204" pitchFamily="49" charset="0"/>
+              </a:rPr>
+              <a:t>",</a:t>
+            </a:r>
+          </a:p>
+          <a:p>
+            <a:r>
+              <a:rPr lang="en-GB" sz="878" dirty="0">
+                <a:solidFill>
+                  <a:srgbClr val="001080"/>
+                </a:solidFill>
+                <a:latin typeface="Consolas" panose="020B0609020204030204" pitchFamily="49" charset="0"/>
+                <a:cs typeface="Consolas" panose="020B0609020204030204" pitchFamily="49" charset="0"/>
+              </a:rPr>
+              <a:t>    properties:</a:t>
+            </a:r>
+            <a:r>
+              <a:rPr lang="en-GB" sz="878" dirty="0">
+                <a:solidFill>
+                  <a:srgbClr val="3B3B3B"/>
+                </a:solidFill>
+                <a:latin typeface="Consolas" panose="020B0609020204030204" pitchFamily="49" charset="0"/>
+                <a:cs typeface="Consolas" panose="020B0609020204030204" pitchFamily="49" charset="0"/>
+              </a:rPr>
+              <a:t> {</a:t>
+            </a:r>
+          </a:p>
+          <a:p>
+            <a:r>
+              <a:rPr lang="en-GB" sz="878" dirty="0">
+                <a:solidFill>
+                  <a:srgbClr val="001080"/>
+                </a:solidFill>
+                <a:latin typeface="Consolas" panose="020B0609020204030204" pitchFamily="49" charset="0"/>
+                <a:cs typeface="Consolas" panose="020B0609020204030204" pitchFamily="49" charset="0"/>
+              </a:rPr>
+              <a:t>      </a:t>
+            </a:r>
+            <a:r>
+              <a:rPr lang="en-GB" sz="878" dirty="0" err="1">
+                <a:solidFill>
+                  <a:srgbClr val="001080"/>
+                </a:solidFill>
+                <a:latin typeface="Consolas" panose="020B0609020204030204" pitchFamily="49" charset="0"/>
+                <a:cs typeface="Consolas" panose="020B0609020204030204" pitchFamily="49" charset="0"/>
+              </a:rPr>
+              <a:t>url</a:t>
+            </a:r>
+            <a:r>
+              <a:rPr lang="en-GB" sz="878" dirty="0">
+                <a:solidFill>
+                  <a:srgbClr val="001080"/>
+                </a:solidFill>
+                <a:latin typeface="Consolas" panose="020B0609020204030204" pitchFamily="49" charset="0"/>
+                <a:cs typeface="Consolas" panose="020B0609020204030204" pitchFamily="49" charset="0"/>
+              </a:rPr>
+              <a:t>:</a:t>
+            </a:r>
+            <a:r>
+              <a:rPr lang="en-GB" sz="878" dirty="0">
+                <a:solidFill>
+                  <a:srgbClr val="3B3B3B"/>
+                </a:solidFill>
+                <a:latin typeface="Consolas" panose="020B0609020204030204" pitchFamily="49" charset="0"/>
+                <a:cs typeface="Consolas" panose="020B0609020204030204" pitchFamily="49" charset="0"/>
+              </a:rPr>
+              <a:t> {</a:t>
+            </a:r>
+          </a:p>
+          <a:p>
+            <a:r>
+              <a:rPr lang="en-GB" sz="878" dirty="0">
+                <a:solidFill>
+                  <a:srgbClr val="001080"/>
+                </a:solidFill>
+                <a:latin typeface="Consolas" panose="020B0609020204030204" pitchFamily="49" charset="0"/>
+                <a:cs typeface="Consolas" panose="020B0609020204030204" pitchFamily="49" charset="0"/>
+              </a:rPr>
+              <a:t>        </a:t>
+            </a:r>
+            <a:r>
+              <a:rPr lang="en-GB" sz="878" dirty="0" err="1">
+                <a:solidFill>
+                  <a:srgbClr val="001080"/>
+                </a:solidFill>
+                <a:latin typeface="Consolas" panose="020B0609020204030204" pitchFamily="49" charset="0"/>
+                <a:cs typeface="Consolas" panose="020B0609020204030204" pitchFamily="49" charset="0"/>
+              </a:rPr>
+              <a:t>type:</a:t>
+            </a:r>
+            <a:r>
+              <a:rPr lang="en-GB" sz="878" dirty="0" err="1">
+                <a:solidFill>
+                  <a:srgbClr val="A31515"/>
+                </a:solidFill>
+                <a:latin typeface="Consolas" panose="020B0609020204030204" pitchFamily="49" charset="0"/>
+                <a:cs typeface="Consolas" panose="020B0609020204030204" pitchFamily="49" charset="0"/>
+              </a:rPr>
+              <a:t>"string</a:t>
+            </a:r>
+            <a:r>
+              <a:rPr lang="en-GB" sz="878" dirty="0">
+                <a:solidFill>
+                  <a:srgbClr val="A31515"/>
+                </a:solidFill>
+                <a:latin typeface="Consolas" panose="020B0609020204030204" pitchFamily="49" charset="0"/>
+                <a:cs typeface="Consolas" panose="020B0609020204030204" pitchFamily="49" charset="0"/>
+              </a:rPr>
+              <a:t>"</a:t>
+            </a:r>
+            <a:r>
+              <a:rPr lang="en-GB" sz="878" dirty="0">
+                <a:solidFill>
+                  <a:srgbClr val="CD3131"/>
+                </a:solidFill>
+                <a:latin typeface="Consolas" panose="020B0609020204030204" pitchFamily="49" charset="0"/>
+                <a:cs typeface="Consolas" panose="020B0609020204030204" pitchFamily="49" charset="0"/>
+              </a:rPr>
+              <a:t>,</a:t>
+            </a:r>
+            <a:endParaRPr lang="en-GB" sz="878" dirty="0">
+              <a:solidFill>
+                <a:srgbClr val="3B3B3B"/>
+              </a:solidFill>
+              <a:latin typeface="Consolas" panose="020B0609020204030204" pitchFamily="49" charset="0"/>
+              <a:cs typeface="Consolas" panose="020B0609020204030204" pitchFamily="49" charset="0"/>
+            </a:endParaRPr>
+          </a:p>
+          <a:p>
+            <a:r>
+              <a:rPr lang="en-GB" sz="878" dirty="0">
+                <a:solidFill>
+                  <a:srgbClr val="001080"/>
+                </a:solidFill>
+                <a:latin typeface="Consolas" panose="020B0609020204030204" pitchFamily="49" charset="0"/>
+                <a:cs typeface="Consolas" panose="020B0609020204030204" pitchFamily="49" charset="0"/>
+              </a:rPr>
+              <a:t>        </a:t>
+            </a:r>
+            <a:r>
+              <a:rPr lang="en-GB" sz="878" dirty="0" err="1">
+                <a:solidFill>
+                  <a:srgbClr val="001080"/>
+                </a:solidFill>
+                <a:latin typeface="Consolas" panose="020B0609020204030204" pitchFamily="49" charset="0"/>
+                <a:cs typeface="Consolas" panose="020B0609020204030204" pitchFamily="49" charset="0"/>
+              </a:rPr>
+              <a:t>description</a:t>
+            </a:r>
+            <a:r>
+              <a:rPr lang="en-GB" sz="878" dirty="0" err="1">
+                <a:solidFill>
+                  <a:srgbClr val="3B3B3B"/>
+                </a:solidFill>
+                <a:latin typeface="Consolas" panose="020B0609020204030204" pitchFamily="49" charset="0"/>
+                <a:cs typeface="Consolas" panose="020B0609020204030204" pitchFamily="49" charset="0"/>
+              </a:rPr>
+              <a:t>:</a:t>
+            </a:r>
+            <a:r>
+              <a:rPr lang="en-GB" sz="878" dirty="0" err="1">
+                <a:solidFill>
+                  <a:srgbClr val="A31515"/>
+                </a:solidFill>
+                <a:latin typeface="Consolas" panose="020B0609020204030204" pitchFamily="49" charset="0"/>
+                <a:cs typeface="Consolas" panose="020B0609020204030204" pitchFamily="49" charset="0"/>
+              </a:rPr>
+              <a:t>"URL</a:t>
+            </a:r>
+            <a:r>
+              <a:rPr lang="en-GB" sz="878" dirty="0">
+                <a:solidFill>
+                  <a:srgbClr val="A31515"/>
+                </a:solidFill>
+                <a:latin typeface="Consolas" panose="020B0609020204030204" pitchFamily="49" charset="0"/>
+                <a:cs typeface="Consolas" panose="020B0609020204030204" pitchFamily="49" charset="0"/>
+              </a:rPr>
+              <a:t> of the webpage to convert</a:t>
+            </a:r>
+            <a:r>
+              <a:rPr lang="en-GB" sz="878" dirty="0">
+                <a:solidFill>
+                  <a:srgbClr val="CD3131"/>
+                </a:solidFill>
+                <a:latin typeface="Consolas" panose="020B0609020204030204" pitchFamily="49" charset="0"/>
+                <a:cs typeface="Consolas" panose="020B0609020204030204" pitchFamily="49" charset="0"/>
+              </a:rPr>
+              <a:t>"</a:t>
+            </a:r>
+            <a:endParaRPr lang="en-GB" sz="878" dirty="0">
+              <a:solidFill>
+                <a:srgbClr val="3B3B3B"/>
+              </a:solidFill>
+              <a:latin typeface="Consolas" panose="020B0609020204030204" pitchFamily="49" charset="0"/>
+              <a:cs typeface="Consolas" panose="020B0609020204030204" pitchFamily="49" charset="0"/>
+            </a:endParaRPr>
+          </a:p>
+          <a:p>
+            <a:r>
+              <a:rPr lang="en-GB" sz="878" dirty="0">
+                <a:solidFill>
+                  <a:srgbClr val="3B3B3B"/>
+                </a:solidFill>
+                <a:latin typeface="Consolas" panose="020B0609020204030204" pitchFamily="49" charset="0"/>
+                <a:cs typeface="Consolas" panose="020B0609020204030204" pitchFamily="49" charset="0"/>
+              </a:rPr>
+              <a:t>      },</a:t>
+            </a:r>
+          </a:p>
+          <a:p>
+            <a:r>
+              <a:rPr lang="en-GB" sz="878" dirty="0">
+                <a:solidFill>
+                  <a:srgbClr val="3B3B3B"/>
+                </a:solidFill>
+                <a:latin typeface="Consolas" panose="020B0609020204030204" pitchFamily="49" charset="0"/>
+                <a:cs typeface="Consolas" panose="020B0609020204030204" pitchFamily="49" charset="0"/>
+              </a:rPr>
+              <a:t>    }, </a:t>
+            </a:r>
+            <a:r>
+              <a:rPr lang="en-GB" sz="878" dirty="0">
+                <a:solidFill>
+                  <a:srgbClr val="001080"/>
+                </a:solidFill>
+                <a:latin typeface="Consolas" panose="020B0609020204030204" pitchFamily="49" charset="0"/>
+                <a:cs typeface="Consolas" panose="020B0609020204030204" pitchFamily="49" charset="0"/>
+              </a:rPr>
+              <a:t>required:</a:t>
+            </a:r>
+            <a:r>
+              <a:rPr lang="en-GB" sz="878" dirty="0">
+                <a:solidFill>
+                  <a:srgbClr val="3B3B3B"/>
+                </a:solidFill>
+                <a:latin typeface="Consolas" panose="020B0609020204030204" pitchFamily="49" charset="0"/>
+                <a:cs typeface="Consolas" panose="020B0609020204030204" pitchFamily="49" charset="0"/>
+              </a:rPr>
+              <a:t> [</a:t>
+            </a:r>
+            <a:r>
+              <a:rPr lang="en-GB" sz="878" dirty="0">
+                <a:solidFill>
+                  <a:srgbClr val="A31515"/>
+                </a:solidFill>
+                <a:latin typeface="Consolas" panose="020B0609020204030204" pitchFamily="49" charset="0"/>
+                <a:cs typeface="Consolas" panose="020B0609020204030204" pitchFamily="49" charset="0"/>
+              </a:rPr>
+              <a:t>"</a:t>
+            </a:r>
+            <a:r>
+              <a:rPr lang="en-GB" sz="878" dirty="0" err="1">
+                <a:solidFill>
+                  <a:srgbClr val="A31515"/>
+                </a:solidFill>
+                <a:latin typeface="Consolas" panose="020B0609020204030204" pitchFamily="49" charset="0"/>
+                <a:cs typeface="Consolas" panose="020B0609020204030204" pitchFamily="49" charset="0"/>
+              </a:rPr>
+              <a:t>url</a:t>
+            </a:r>
+            <a:r>
+              <a:rPr lang="en-GB" sz="878" dirty="0">
+                <a:solidFill>
+                  <a:srgbClr val="A31515"/>
+                </a:solidFill>
+                <a:latin typeface="Consolas" panose="020B0609020204030204" pitchFamily="49" charset="0"/>
+                <a:cs typeface="Consolas" panose="020B0609020204030204" pitchFamily="49" charset="0"/>
+              </a:rPr>
+              <a:t>"</a:t>
+            </a:r>
+            <a:r>
+              <a:rPr lang="en-GB" sz="878" dirty="0">
+                <a:solidFill>
+                  <a:srgbClr val="3B3B3B"/>
+                </a:solidFill>
+                <a:latin typeface="Consolas" panose="020B0609020204030204" pitchFamily="49" charset="0"/>
+                <a:cs typeface="Consolas" panose="020B0609020204030204" pitchFamily="49" charset="0"/>
+              </a:rPr>
+              <a:t>], },});</a:t>
+            </a:r>
+          </a:p>
+          <a:p>
+            <a:br>
+              <a:rPr lang="en-GB" sz="878" dirty="0">
+                <a:solidFill>
+                  <a:srgbClr val="3B3B3B"/>
+                </a:solidFill>
+                <a:latin typeface="Consolas" panose="020B0609020204030204" pitchFamily="49" charset="0"/>
+                <a:cs typeface="Consolas" panose="020B0609020204030204" pitchFamily="49" charset="0"/>
+              </a:rPr>
+            </a:br>
+            <a:endParaRPr lang="en-GB" sz="878" dirty="0">
+              <a:solidFill>
+                <a:srgbClr val="3B3B3B"/>
+              </a:solidFill>
+              <a:latin typeface="Consolas" panose="020B0609020204030204" pitchFamily="49" charset="0"/>
+              <a:cs typeface="Consolas" panose="020B0609020204030204" pitchFamily="49" charset="0"/>
+            </a:endParaRPr>
+          </a:p>
+        </p:txBody>
+      </p:sp>
+      <p:sp>
+        <p:nvSpPr>
+          <p:cNvPr id="14" name="TextBox 13"/>
+          <p:cNvSpPr txBox="1"/>
+          <p:nvPr/>
+        </p:nvSpPr>
+        <p:spPr>
+          <a:xfrm>
+            <a:off x="4974246" y="-3218641"/>
+            <a:ext cx="3100296" cy="2996784"/>
+          </a:xfrm>
+          <a:prstGeom prst="rect">
+            <a:avLst/>
+          </a:prstGeom>
+          <a:solidFill>
+            <a:srgbClr val="FFFFFF"/>
+          </a:solidFill>
+          <a:ln w="15875">
+            <a:solidFill>
+              <a:schemeClr val="tx1"/>
+            </a:solidFill>
+          </a:ln>
+        </p:spPr>
+        <p:txBody>
+          <a:bodyPr wrap="square" rtlCol="0">
+            <a:noAutofit/>
+          </a:bodyPr>
+          <a:lstStyle/>
+          <a:p>
+            <a:r>
+              <a:rPr lang="en-GB" sz="878" dirty="0">
+                <a:solidFill>
+                  <a:srgbClr val="116329"/>
+                </a:solidFill>
+                <a:latin typeface="JetBrains Mono"/>
+              </a:rPr>
+              <a:t>"tools"</a:t>
+            </a:r>
+            <a:r>
+              <a:rPr lang="en-GB" sz="878" dirty="0">
+                <a:solidFill>
+                  <a:srgbClr val="1F2328"/>
+                </a:solidFill>
+                <a:latin typeface="JetBrains Mono"/>
+              </a:rPr>
+              <a:t>: [{ </a:t>
+            </a:r>
+          </a:p>
+          <a:p>
+            <a:r>
+              <a:rPr lang="en-GB" sz="878" dirty="0">
+                <a:solidFill>
+                  <a:srgbClr val="1F2328"/>
+                </a:solidFill>
+                <a:latin typeface="JetBrains Mono"/>
+              </a:rPr>
+              <a:t>    </a:t>
+            </a:r>
+            <a:r>
+              <a:rPr lang="en-GB" sz="878" dirty="0">
+                <a:solidFill>
+                  <a:srgbClr val="116329"/>
+                </a:solidFill>
+                <a:latin typeface="JetBrains Mono"/>
+              </a:rPr>
+              <a:t>"name"</a:t>
+            </a:r>
+            <a:r>
+              <a:rPr lang="en-GB" sz="878" dirty="0">
+                <a:solidFill>
+                  <a:srgbClr val="1F2328"/>
+                </a:solidFill>
+                <a:latin typeface="JetBrains Mono"/>
+              </a:rPr>
+              <a:t>: </a:t>
+            </a:r>
+            <a:r>
+              <a:rPr lang="en-GB" sz="878" dirty="0">
+                <a:solidFill>
+                  <a:srgbClr val="0A3069"/>
+                </a:solidFill>
+                <a:latin typeface="JetBrains Mono"/>
+              </a:rPr>
+              <a:t>"</a:t>
+            </a:r>
+            <a:r>
+              <a:rPr lang="en-GB" sz="878" dirty="0" err="1">
+                <a:solidFill>
+                  <a:srgbClr val="0A3069"/>
+                </a:solidFill>
+                <a:latin typeface="JetBrains Mono"/>
+              </a:rPr>
+              <a:t>get_weather</a:t>
+            </a:r>
+            <a:r>
+              <a:rPr lang="en-GB" sz="878" dirty="0">
+                <a:solidFill>
+                  <a:srgbClr val="0A3069"/>
+                </a:solidFill>
+                <a:latin typeface="JetBrains Mono"/>
+              </a:rPr>
+              <a:t>"</a:t>
+            </a:r>
+            <a:r>
+              <a:rPr lang="en-GB" sz="878" dirty="0">
+                <a:solidFill>
+                  <a:srgbClr val="1F2328"/>
+                </a:solidFill>
+                <a:latin typeface="JetBrains Mono"/>
+              </a:rPr>
+              <a:t>, </a:t>
+            </a:r>
+          </a:p>
+          <a:p>
+            <a:r>
+              <a:rPr lang="en-GB" sz="878" dirty="0">
+                <a:solidFill>
+                  <a:srgbClr val="1F2328"/>
+                </a:solidFill>
+                <a:latin typeface="JetBrains Mono"/>
+              </a:rPr>
+              <a:t>    </a:t>
+            </a:r>
+            <a:r>
+              <a:rPr lang="en-GB" sz="878" dirty="0">
+                <a:solidFill>
+                  <a:srgbClr val="116329"/>
+                </a:solidFill>
+                <a:latin typeface="JetBrains Mono"/>
+              </a:rPr>
+              <a:t>"title"</a:t>
+            </a:r>
+            <a:r>
+              <a:rPr lang="en-GB" sz="878" dirty="0">
+                <a:solidFill>
+                  <a:srgbClr val="1F2328"/>
+                </a:solidFill>
+                <a:latin typeface="JetBrains Mono"/>
+              </a:rPr>
+              <a:t>: </a:t>
+            </a:r>
+            <a:r>
+              <a:rPr lang="en-GB" sz="878" dirty="0">
+                <a:solidFill>
+                  <a:srgbClr val="0A3069"/>
+                </a:solidFill>
+                <a:latin typeface="JetBrains Mono"/>
+              </a:rPr>
+              <a:t>"Weather Information Provider"</a:t>
+            </a:r>
+            <a:r>
+              <a:rPr lang="en-GB" sz="878" dirty="0">
+                <a:solidFill>
+                  <a:srgbClr val="1F2328"/>
+                </a:solidFill>
+                <a:latin typeface="JetBrains Mono"/>
+              </a:rPr>
+              <a:t>, </a:t>
+            </a:r>
+          </a:p>
+          <a:p>
+            <a:r>
+              <a:rPr lang="en-GB" sz="878" dirty="0">
+                <a:solidFill>
+                  <a:srgbClr val="1F2328"/>
+                </a:solidFill>
+                <a:latin typeface="JetBrains Mono"/>
+              </a:rPr>
+              <a:t>    </a:t>
+            </a:r>
+            <a:r>
+              <a:rPr lang="en-GB" sz="878" dirty="0">
+                <a:solidFill>
+                  <a:srgbClr val="116329"/>
+                </a:solidFill>
+                <a:latin typeface="JetBrains Mono"/>
+              </a:rPr>
+              <a:t>"description"</a:t>
+            </a:r>
+            <a:r>
+              <a:rPr lang="en-GB" sz="878" dirty="0">
+                <a:solidFill>
+                  <a:srgbClr val="1F2328"/>
+                </a:solidFill>
+                <a:latin typeface="JetBrains Mono"/>
+              </a:rPr>
+              <a:t>: </a:t>
+            </a:r>
+            <a:r>
+              <a:rPr lang="en-GB" sz="878" dirty="0">
+                <a:solidFill>
+                  <a:srgbClr val="0A3069"/>
+                </a:solidFill>
+                <a:latin typeface="JetBrains Mono"/>
+              </a:rPr>
+              <a:t>"Get current weather information for a location"</a:t>
+            </a:r>
+            <a:r>
+              <a:rPr lang="en-GB" sz="878" dirty="0">
+                <a:solidFill>
+                  <a:srgbClr val="1F2328"/>
+                </a:solidFill>
+                <a:latin typeface="JetBrains Mono"/>
+              </a:rPr>
+              <a:t>, </a:t>
+            </a:r>
+          </a:p>
+          <a:p>
+            <a:r>
+              <a:rPr lang="en-GB" sz="878" dirty="0">
+                <a:solidFill>
+                  <a:srgbClr val="1F2328"/>
+                </a:solidFill>
+                <a:latin typeface="JetBrains Mono"/>
+              </a:rPr>
+              <a:t>    </a:t>
+            </a:r>
+            <a:r>
+              <a:rPr lang="en-GB" sz="878" dirty="0">
+                <a:solidFill>
+                  <a:srgbClr val="116329"/>
+                </a:solidFill>
+                <a:latin typeface="JetBrains Mono"/>
+              </a:rPr>
+              <a:t>"</a:t>
+            </a:r>
+            <a:r>
+              <a:rPr lang="en-GB" sz="878" dirty="0" err="1">
+                <a:solidFill>
+                  <a:srgbClr val="116329"/>
+                </a:solidFill>
+                <a:latin typeface="JetBrains Mono"/>
+              </a:rPr>
+              <a:t>inputSchema</a:t>
+            </a:r>
+            <a:r>
+              <a:rPr lang="en-GB" sz="878" dirty="0">
+                <a:solidFill>
+                  <a:srgbClr val="116329"/>
+                </a:solidFill>
+                <a:latin typeface="JetBrains Mono"/>
+              </a:rPr>
+              <a:t>"</a:t>
+            </a:r>
+            <a:r>
+              <a:rPr lang="en-GB" sz="878" dirty="0">
+                <a:solidFill>
+                  <a:srgbClr val="1F2328"/>
+                </a:solidFill>
+                <a:latin typeface="JetBrains Mono"/>
+              </a:rPr>
+              <a:t>: {</a:t>
+            </a:r>
+          </a:p>
+          <a:p>
+            <a:r>
+              <a:rPr lang="en-GB" sz="878" dirty="0">
+                <a:solidFill>
+                  <a:srgbClr val="1F2328"/>
+                </a:solidFill>
+                <a:latin typeface="JetBrains Mono"/>
+              </a:rPr>
+              <a:t>            </a:t>
+            </a:r>
+            <a:r>
+              <a:rPr lang="en-GB" sz="878" dirty="0">
+                <a:solidFill>
+                  <a:srgbClr val="116329"/>
+                </a:solidFill>
+                <a:latin typeface="JetBrains Mono"/>
+              </a:rPr>
+              <a:t>"type"</a:t>
+            </a:r>
+            <a:r>
+              <a:rPr lang="en-GB" sz="878" dirty="0">
+                <a:solidFill>
+                  <a:srgbClr val="1F2328"/>
+                </a:solidFill>
+                <a:latin typeface="JetBrains Mono"/>
+              </a:rPr>
+              <a:t>: </a:t>
+            </a:r>
+            <a:r>
+              <a:rPr lang="en-GB" sz="878" dirty="0">
+                <a:solidFill>
+                  <a:srgbClr val="0A3069"/>
+                </a:solidFill>
+                <a:latin typeface="JetBrains Mono"/>
+              </a:rPr>
+              <a:t>"object"</a:t>
+            </a:r>
+            <a:r>
+              <a:rPr lang="en-GB" sz="878" dirty="0">
+                <a:solidFill>
+                  <a:srgbClr val="1F2328"/>
+                </a:solidFill>
+                <a:latin typeface="JetBrains Mono"/>
+              </a:rPr>
+              <a:t>,</a:t>
+            </a:r>
+          </a:p>
+          <a:p>
+            <a:r>
+              <a:rPr lang="en-GB" sz="878" dirty="0">
+                <a:solidFill>
+                  <a:srgbClr val="1F2328"/>
+                </a:solidFill>
+                <a:latin typeface="JetBrains Mono"/>
+              </a:rPr>
+              <a:t>            </a:t>
+            </a:r>
+            <a:r>
+              <a:rPr lang="en-GB" sz="878" dirty="0">
+                <a:solidFill>
+                  <a:srgbClr val="116329"/>
+                </a:solidFill>
+                <a:latin typeface="JetBrains Mono"/>
+              </a:rPr>
+              <a:t>"properties"</a:t>
+            </a:r>
+            <a:r>
+              <a:rPr lang="en-GB" sz="878" dirty="0">
+                <a:solidFill>
+                  <a:srgbClr val="1F2328"/>
+                </a:solidFill>
+                <a:latin typeface="JetBrains Mono"/>
+              </a:rPr>
+              <a:t>: {</a:t>
+            </a:r>
+          </a:p>
+          <a:p>
+            <a:r>
+              <a:rPr lang="en-GB" sz="878" dirty="0">
+                <a:solidFill>
+                  <a:srgbClr val="1F2328"/>
+                </a:solidFill>
+                <a:latin typeface="JetBrains Mono"/>
+              </a:rPr>
+              <a:t>                    </a:t>
+            </a:r>
+            <a:r>
+              <a:rPr lang="en-GB" sz="878" dirty="0">
+                <a:solidFill>
+                  <a:srgbClr val="116329"/>
+                </a:solidFill>
+                <a:latin typeface="JetBrains Mono"/>
+              </a:rPr>
+              <a:t>"location"</a:t>
+            </a:r>
+            <a:r>
+              <a:rPr lang="en-GB" sz="878" dirty="0">
+                <a:solidFill>
+                  <a:srgbClr val="1F2328"/>
+                </a:solidFill>
+                <a:latin typeface="JetBrains Mono"/>
+              </a:rPr>
+              <a:t>: {</a:t>
+            </a:r>
+          </a:p>
+          <a:p>
+            <a:r>
+              <a:rPr lang="en-GB" sz="878" dirty="0">
+                <a:solidFill>
+                  <a:srgbClr val="1F2328"/>
+                </a:solidFill>
+                <a:latin typeface="JetBrains Mono"/>
+              </a:rPr>
+              <a:t>                            </a:t>
+            </a:r>
+            <a:r>
+              <a:rPr lang="en-GB" sz="878" dirty="0">
+                <a:solidFill>
+                  <a:srgbClr val="116329"/>
+                </a:solidFill>
+                <a:latin typeface="JetBrains Mono"/>
+              </a:rPr>
+              <a:t>"type"</a:t>
+            </a:r>
+            <a:r>
+              <a:rPr lang="en-GB" sz="878" dirty="0">
+                <a:solidFill>
+                  <a:srgbClr val="1F2328"/>
+                </a:solidFill>
+                <a:latin typeface="JetBrains Mono"/>
+              </a:rPr>
+              <a:t>: </a:t>
+            </a:r>
+            <a:r>
+              <a:rPr lang="en-GB" sz="878" dirty="0">
+                <a:solidFill>
+                  <a:srgbClr val="0A3069"/>
+                </a:solidFill>
+                <a:latin typeface="JetBrains Mono"/>
+              </a:rPr>
+              <a:t>"string"</a:t>
+            </a:r>
+            <a:r>
+              <a:rPr lang="en-GB" sz="878" dirty="0">
+                <a:solidFill>
+                  <a:srgbClr val="1F2328"/>
+                </a:solidFill>
+                <a:latin typeface="JetBrains Mono"/>
+              </a:rPr>
+              <a:t>, </a:t>
+            </a:r>
+          </a:p>
+          <a:p>
+            <a:r>
+              <a:rPr lang="en-GB" sz="878" dirty="0">
+                <a:solidFill>
+                  <a:srgbClr val="116329"/>
+                </a:solidFill>
+                <a:latin typeface="JetBrains Mono"/>
+              </a:rPr>
+              <a:t>                            "description"</a:t>
+            </a:r>
+            <a:r>
+              <a:rPr lang="en-GB" sz="878" dirty="0">
+                <a:solidFill>
+                  <a:srgbClr val="1F2328"/>
+                </a:solidFill>
+                <a:latin typeface="JetBrains Mono"/>
+              </a:rPr>
+              <a:t>: </a:t>
+            </a:r>
+            <a:r>
+              <a:rPr lang="en-GB" sz="878" dirty="0">
+                <a:solidFill>
+                  <a:srgbClr val="0A3069"/>
+                </a:solidFill>
+                <a:latin typeface="JetBrains Mono"/>
+              </a:rPr>
+              <a:t>"City name or zip code”</a:t>
+            </a:r>
+            <a:endParaRPr lang="en-GB" sz="878" dirty="0">
+              <a:solidFill>
+                <a:srgbClr val="1F2328"/>
+              </a:solidFill>
+              <a:latin typeface="JetBrains Mono"/>
+            </a:endParaRPr>
+          </a:p>
+          <a:p>
+            <a:r>
+              <a:rPr lang="en-GB" sz="878" dirty="0">
+                <a:solidFill>
+                  <a:srgbClr val="1F2328"/>
+                </a:solidFill>
+                <a:latin typeface="JetBrains Mono"/>
+              </a:rPr>
+              <a:t>                    }</a:t>
+            </a:r>
+          </a:p>
+          <a:p>
+            <a:r>
+              <a:rPr lang="en-GB" sz="878" dirty="0">
+                <a:solidFill>
+                  <a:srgbClr val="1F2328"/>
+                </a:solidFill>
+                <a:latin typeface="JetBrains Mono"/>
+              </a:rPr>
+              <a:t>            }, </a:t>
+            </a:r>
+          </a:p>
+          <a:p>
+            <a:r>
+              <a:rPr lang="en-GB" sz="878" dirty="0">
+                <a:solidFill>
+                  <a:srgbClr val="1F2328"/>
+                </a:solidFill>
+                <a:latin typeface="JetBrains Mono"/>
+              </a:rPr>
+              <a:t>            </a:t>
+            </a:r>
+            <a:r>
+              <a:rPr lang="en-GB" sz="878" dirty="0">
+                <a:solidFill>
+                  <a:srgbClr val="116329"/>
+                </a:solidFill>
+                <a:latin typeface="JetBrains Mono"/>
+              </a:rPr>
+              <a:t>"required"</a:t>
+            </a:r>
+            <a:r>
+              <a:rPr lang="en-GB" sz="878" dirty="0">
+                <a:solidFill>
+                  <a:srgbClr val="1F2328"/>
+                </a:solidFill>
+                <a:latin typeface="JetBrains Mono"/>
+              </a:rPr>
+              <a:t>: [ </a:t>
+            </a:r>
+            <a:r>
+              <a:rPr lang="en-GB" sz="878" dirty="0">
+                <a:solidFill>
+                  <a:srgbClr val="0A3069"/>
+                </a:solidFill>
+                <a:latin typeface="JetBrains Mono"/>
+              </a:rPr>
+              <a:t>"location” </a:t>
+            </a:r>
+            <a:r>
+              <a:rPr lang="en-GB" sz="878" dirty="0">
+                <a:solidFill>
+                  <a:srgbClr val="1F2328"/>
+                </a:solidFill>
+                <a:latin typeface="JetBrains Mono"/>
+              </a:rPr>
+              <a:t>]</a:t>
+            </a:r>
+          </a:p>
+          <a:p>
+            <a:r>
+              <a:rPr lang="en-GB" sz="878" dirty="0">
+                <a:solidFill>
+                  <a:srgbClr val="1F2328"/>
+                </a:solidFill>
+                <a:latin typeface="JetBrains Mono"/>
+              </a:rPr>
+              <a:t>    },</a:t>
+            </a:r>
+          </a:p>
+          <a:p>
+            <a:r>
+              <a:rPr lang="en-GB" sz="878" dirty="0">
+                <a:solidFill>
+                  <a:srgbClr val="1F2328"/>
+                </a:solidFill>
+                <a:latin typeface="JetBrains Mono"/>
+              </a:rPr>
+              <a:t>    </a:t>
+            </a:r>
+            <a:r>
+              <a:rPr lang="en-GB" sz="878" dirty="0">
+                <a:solidFill>
+                  <a:srgbClr val="116329"/>
+                </a:solidFill>
+                <a:latin typeface="JetBrains Mono"/>
+              </a:rPr>
+              <a:t>"icons"</a:t>
+            </a:r>
+            <a:r>
+              <a:rPr lang="en-GB" sz="878" dirty="0">
+                <a:solidFill>
+                  <a:srgbClr val="1F2328"/>
+                </a:solidFill>
+                <a:latin typeface="JetBrains Mono"/>
+              </a:rPr>
+              <a:t>: [</a:t>
+            </a:r>
+          </a:p>
+          <a:p>
+            <a:r>
+              <a:rPr lang="en-GB" sz="878" dirty="0">
+                <a:solidFill>
+                  <a:srgbClr val="1F2328"/>
+                </a:solidFill>
+                <a:latin typeface="JetBrains Mono"/>
+              </a:rPr>
+              <a:t>            {</a:t>
+            </a:r>
+          </a:p>
+          <a:p>
+            <a:r>
+              <a:rPr lang="en-GB" sz="878" dirty="0">
+                <a:solidFill>
+                  <a:srgbClr val="1F2328"/>
+                </a:solidFill>
+                <a:latin typeface="JetBrains Mono"/>
+              </a:rPr>
+              <a:t>                    </a:t>
+            </a:r>
+            <a:r>
+              <a:rPr lang="en-GB" sz="878" dirty="0">
+                <a:solidFill>
+                  <a:srgbClr val="116329"/>
+                </a:solidFill>
+                <a:latin typeface="JetBrains Mono"/>
+              </a:rPr>
+              <a:t>"</a:t>
+            </a:r>
+            <a:r>
+              <a:rPr lang="en-GB" sz="878" dirty="0" err="1">
+                <a:solidFill>
+                  <a:srgbClr val="116329"/>
+                </a:solidFill>
+                <a:latin typeface="JetBrains Mono"/>
+              </a:rPr>
+              <a:t>src</a:t>
+            </a:r>
+            <a:r>
+              <a:rPr lang="en-GB" sz="878" dirty="0">
+                <a:solidFill>
+                  <a:srgbClr val="116329"/>
+                </a:solidFill>
+                <a:latin typeface="JetBrains Mono"/>
+              </a:rPr>
+              <a:t>"</a:t>
+            </a:r>
+            <a:r>
+              <a:rPr lang="en-GB" sz="878" dirty="0">
+                <a:solidFill>
+                  <a:srgbClr val="1F2328"/>
+                </a:solidFill>
+                <a:latin typeface="JetBrains Mono"/>
+              </a:rPr>
+              <a:t>: </a:t>
+            </a:r>
+            <a:r>
+              <a:rPr lang="en-GB" sz="878" dirty="0">
+                <a:solidFill>
+                  <a:srgbClr val="0A3069"/>
+                </a:solidFill>
+                <a:latin typeface="JetBrains Mono"/>
+              </a:rPr>
+              <a:t>"https://</a:t>
+            </a:r>
+            <a:r>
+              <a:rPr lang="en-GB" sz="878" dirty="0" err="1">
+                <a:solidFill>
+                  <a:srgbClr val="0A3069"/>
+                </a:solidFill>
+                <a:latin typeface="JetBrains Mono"/>
+              </a:rPr>
+              <a:t>example.com</a:t>
+            </a:r>
+            <a:r>
+              <a:rPr lang="en-GB" sz="878" dirty="0">
+                <a:solidFill>
+                  <a:srgbClr val="0A3069"/>
+                </a:solidFill>
+                <a:latin typeface="JetBrains Mono"/>
+              </a:rPr>
+              <a:t>/weather-</a:t>
+            </a:r>
+            <a:r>
+              <a:rPr lang="en-GB" sz="878" dirty="0" err="1">
+                <a:solidFill>
+                  <a:srgbClr val="0A3069"/>
+                </a:solidFill>
+                <a:latin typeface="JetBrains Mono"/>
+              </a:rPr>
+              <a:t>icon.png</a:t>
+            </a:r>
+            <a:r>
+              <a:rPr lang="en-GB" sz="878" dirty="0">
+                <a:solidFill>
+                  <a:srgbClr val="0A3069"/>
+                </a:solidFill>
+                <a:latin typeface="JetBrains Mono"/>
+              </a:rPr>
+              <a:t>"</a:t>
+            </a:r>
+            <a:r>
+              <a:rPr lang="en-GB" sz="878" dirty="0">
+                <a:solidFill>
+                  <a:srgbClr val="1F2328"/>
+                </a:solidFill>
+                <a:latin typeface="JetBrains Mono"/>
+              </a:rPr>
+              <a:t>,</a:t>
+            </a:r>
+          </a:p>
+          <a:p>
+            <a:r>
+              <a:rPr lang="en-GB" sz="878" dirty="0">
+                <a:solidFill>
+                  <a:srgbClr val="1F2328"/>
+                </a:solidFill>
+                <a:latin typeface="JetBrains Mono"/>
+              </a:rPr>
+              <a:t>                    </a:t>
+            </a:r>
+            <a:r>
+              <a:rPr lang="en-GB" sz="878" dirty="0">
+                <a:solidFill>
+                  <a:srgbClr val="116329"/>
+                </a:solidFill>
+                <a:latin typeface="JetBrains Mono"/>
+              </a:rPr>
+              <a:t>"</a:t>
+            </a:r>
+            <a:r>
+              <a:rPr lang="en-GB" sz="878" dirty="0" err="1">
+                <a:solidFill>
+                  <a:srgbClr val="116329"/>
+                </a:solidFill>
+                <a:latin typeface="JetBrains Mono"/>
+              </a:rPr>
+              <a:t>mimeType</a:t>
+            </a:r>
+            <a:r>
+              <a:rPr lang="en-GB" sz="878" dirty="0">
+                <a:solidFill>
+                  <a:srgbClr val="116329"/>
+                </a:solidFill>
+                <a:latin typeface="JetBrains Mono"/>
+              </a:rPr>
+              <a:t>"</a:t>
+            </a:r>
+            <a:r>
+              <a:rPr lang="en-GB" sz="878" dirty="0">
+                <a:solidFill>
+                  <a:srgbClr val="1F2328"/>
+                </a:solidFill>
+                <a:latin typeface="JetBrains Mono"/>
+              </a:rPr>
+              <a:t>: </a:t>
+            </a:r>
+            <a:r>
+              <a:rPr lang="en-GB" sz="878" dirty="0">
+                <a:solidFill>
+                  <a:srgbClr val="0A3069"/>
+                </a:solidFill>
+                <a:latin typeface="JetBrains Mono"/>
+              </a:rPr>
+              <a:t>"image/</a:t>
+            </a:r>
+            <a:r>
+              <a:rPr lang="en-GB" sz="878" dirty="0" err="1">
+                <a:solidFill>
+                  <a:srgbClr val="0A3069"/>
+                </a:solidFill>
+                <a:latin typeface="JetBrains Mono"/>
+              </a:rPr>
+              <a:t>png</a:t>
+            </a:r>
+            <a:r>
+              <a:rPr lang="en-GB" sz="878" dirty="0">
+                <a:solidFill>
+                  <a:srgbClr val="0A3069"/>
+                </a:solidFill>
+                <a:latin typeface="JetBrains Mono"/>
+              </a:rPr>
+              <a:t>"</a:t>
+            </a:r>
+            <a:r>
+              <a:rPr lang="en-GB" sz="878" dirty="0">
+                <a:solidFill>
+                  <a:srgbClr val="1F2328"/>
+                </a:solidFill>
+                <a:latin typeface="JetBrains Mono"/>
+              </a:rPr>
+              <a:t>,</a:t>
+            </a:r>
+          </a:p>
+          <a:p>
+            <a:r>
+              <a:rPr lang="en-GB" sz="878" dirty="0">
+                <a:solidFill>
+                  <a:srgbClr val="1F2328"/>
+                </a:solidFill>
+                <a:latin typeface="JetBrains Mono"/>
+              </a:rPr>
+              <a:t>                    </a:t>
+            </a:r>
+            <a:r>
+              <a:rPr lang="en-GB" sz="878" dirty="0">
+                <a:solidFill>
+                  <a:srgbClr val="116329"/>
+                </a:solidFill>
+                <a:latin typeface="JetBrains Mono"/>
+              </a:rPr>
+              <a:t>"sizes"</a:t>
+            </a:r>
+            <a:r>
+              <a:rPr lang="en-GB" sz="878" dirty="0">
+                <a:solidFill>
+                  <a:srgbClr val="1F2328"/>
+                </a:solidFill>
+                <a:latin typeface="JetBrains Mono"/>
+              </a:rPr>
+              <a:t>: [</a:t>
+            </a:r>
+            <a:r>
+              <a:rPr lang="en-GB" sz="878" dirty="0">
+                <a:solidFill>
+                  <a:srgbClr val="0A3069"/>
+                </a:solidFill>
+                <a:latin typeface="JetBrains Mono"/>
+              </a:rPr>
+              <a:t>"48x48"</a:t>
+            </a:r>
+            <a:r>
+              <a:rPr lang="en-GB" sz="878" dirty="0">
+                <a:solidFill>
+                  <a:srgbClr val="1F2328"/>
+                </a:solidFill>
+                <a:latin typeface="JetBrains Mono"/>
+              </a:rPr>
+              <a:t>]</a:t>
+            </a:r>
+          </a:p>
+          <a:p>
+            <a:r>
+              <a:rPr lang="en-GB" sz="878" dirty="0">
+                <a:solidFill>
+                  <a:srgbClr val="1F2328"/>
+                </a:solidFill>
+                <a:latin typeface="JetBrains Mono"/>
+              </a:rPr>
+              <a:t>            }</a:t>
+            </a:r>
+          </a:p>
+          <a:p>
+            <a:r>
+              <a:rPr lang="en-GB" sz="878" dirty="0">
+                <a:solidFill>
+                  <a:srgbClr val="1F2328"/>
+                </a:solidFill>
+                <a:latin typeface="JetBrains Mono"/>
+              </a:rPr>
+              <a:t>    ]</a:t>
+            </a:r>
+          </a:p>
+          <a:p>
+            <a:r>
+              <a:rPr lang="en-GB" sz="878" dirty="0">
+                <a:solidFill>
+                  <a:srgbClr val="1F2328"/>
+                </a:solidFill>
+                <a:latin typeface="JetBrains Mono"/>
+              </a:rPr>
+              <a:t>}]</a:t>
+            </a:r>
+            <a:endParaRPr lang="en-US" sz="878" dirty="0"/>
+          </a:p>
+        </p:txBody>
+      </p:sp>
+      <p:sp>
+        <p:nvSpPr>
+          <p:cNvPr id="5" name="TextBox 4">
+            <a:extLst>
+              <a:ext uri="{FF2B5EF4-FFF2-40B4-BE49-F238E27FC236}">
+                <a16:creationId xmlns:a16="http://schemas.microsoft.com/office/drawing/2014/main" id="{38B1C51F-FF10-0BC1-1BD6-20655A760105}"/>
+              </a:ext>
+            </a:extLst>
+          </p:cNvPr>
+          <p:cNvSpPr txBox="1"/>
+          <p:nvPr/>
+        </p:nvSpPr>
+        <p:spPr>
+          <a:xfrm>
+            <a:off x="2239881" y="472448"/>
+            <a:ext cx="412769" cy="1713546"/>
+          </a:xfrm>
+          <a:prstGeom prst="rect">
+            <a:avLst/>
+          </a:prstGeom>
+          <a:noFill/>
+        </p:spPr>
+        <p:txBody>
+          <a:bodyPr wrap="square" rtlCol="0">
+            <a:spAutoFit/>
+          </a:bodyPr>
+          <a:lstStyle/>
+          <a:p>
+            <a:r>
+              <a:rPr lang="en-US" altLang="zh-CN" sz="878" dirty="0">
+                <a:latin typeface="Consolas" panose="020B0609020204030204" pitchFamily="49" charset="0"/>
+                <a:cs typeface="Consolas" panose="020B0609020204030204" pitchFamily="49" charset="0"/>
+              </a:rPr>
+              <a:t>1</a:t>
+            </a:r>
+          </a:p>
+          <a:p>
+            <a:r>
+              <a:rPr lang="en-US" altLang="zh-CN" sz="878" dirty="0">
+                <a:latin typeface="Consolas" panose="020B0609020204030204" pitchFamily="49" charset="0"/>
+                <a:cs typeface="Consolas" panose="020B0609020204030204" pitchFamily="49" charset="0"/>
+              </a:rPr>
+              <a:t>2</a:t>
+            </a:r>
+          </a:p>
+          <a:p>
+            <a:r>
+              <a:rPr lang="en-US" altLang="zh-CN" sz="878" dirty="0">
+                <a:latin typeface="Consolas" panose="020B0609020204030204" pitchFamily="49" charset="0"/>
+                <a:cs typeface="Consolas" panose="020B0609020204030204" pitchFamily="49" charset="0"/>
+              </a:rPr>
+              <a:t>3</a:t>
+            </a:r>
+          </a:p>
+          <a:p>
+            <a:r>
+              <a:rPr lang="en-US" altLang="zh-CN" sz="878" dirty="0">
+                <a:latin typeface="Consolas" panose="020B0609020204030204" pitchFamily="49" charset="0"/>
+                <a:cs typeface="Consolas" panose="020B0609020204030204" pitchFamily="49" charset="0"/>
+              </a:rPr>
+              <a:t>4</a:t>
+            </a:r>
+          </a:p>
+          <a:p>
+            <a:r>
+              <a:rPr lang="en-US" altLang="zh-CN" sz="878" dirty="0">
+                <a:latin typeface="Consolas" panose="020B0609020204030204" pitchFamily="49" charset="0"/>
+                <a:cs typeface="Consolas" panose="020B0609020204030204" pitchFamily="49" charset="0"/>
+              </a:rPr>
+              <a:t>5</a:t>
+            </a:r>
+          </a:p>
+          <a:p>
+            <a:r>
+              <a:rPr lang="en-US" altLang="zh-CN" sz="878" dirty="0">
+                <a:latin typeface="Consolas" panose="020B0609020204030204" pitchFamily="49" charset="0"/>
+                <a:cs typeface="Consolas" panose="020B0609020204030204" pitchFamily="49" charset="0"/>
+              </a:rPr>
+              <a:t>6</a:t>
+            </a:r>
+          </a:p>
+          <a:p>
+            <a:r>
+              <a:rPr lang="en-US" altLang="zh-CN" sz="878" dirty="0">
+                <a:latin typeface="Consolas" panose="020B0609020204030204" pitchFamily="49" charset="0"/>
+                <a:cs typeface="Consolas" panose="020B0609020204030204" pitchFamily="49" charset="0"/>
+              </a:rPr>
+              <a:t>7</a:t>
+            </a:r>
+          </a:p>
+          <a:p>
+            <a:r>
+              <a:rPr lang="en-US" altLang="zh-CN" sz="878" dirty="0">
+                <a:latin typeface="Consolas" panose="020B0609020204030204" pitchFamily="49" charset="0"/>
+                <a:cs typeface="Consolas" panose="020B0609020204030204" pitchFamily="49" charset="0"/>
+              </a:rPr>
+              <a:t>8</a:t>
+            </a:r>
+          </a:p>
+          <a:p>
+            <a:r>
+              <a:rPr lang="en-US" altLang="zh-CN" sz="878" dirty="0">
+                <a:latin typeface="Consolas" panose="020B0609020204030204" pitchFamily="49" charset="0"/>
+                <a:cs typeface="Consolas" panose="020B0609020204030204" pitchFamily="49" charset="0"/>
+              </a:rPr>
+              <a:t>9</a:t>
+            </a:r>
+          </a:p>
+          <a:p>
+            <a:r>
+              <a:rPr lang="en-US" altLang="zh-CN" sz="878" dirty="0">
+                <a:latin typeface="Consolas" panose="020B0609020204030204" pitchFamily="49" charset="0"/>
+                <a:cs typeface="Consolas" panose="020B0609020204030204" pitchFamily="49" charset="0"/>
+              </a:rPr>
+              <a:t>10</a:t>
+            </a:r>
+          </a:p>
+          <a:p>
+            <a:r>
+              <a:rPr lang="en-US" altLang="zh-CN" sz="878" dirty="0">
+                <a:latin typeface="Consolas" panose="020B0609020204030204" pitchFamily="49" charset="0"/>
+                <a:cs typeface="Consolas" panose="020B0609020204030204" pitchFamily="49" charset="0"/>
+              </a:rPr>
+              <a:t>11</a:t>
+            </a:r>
+          </a:p>
+          <a:p>
+            <a:r>
+              <a:rPr lang="en-US" altLang="zh-CN" sz="878" dirty="0">
+                <a:latin typeface="Consolas" panose="020B0609020204030204" pitchFamily="49" charset="0"/>
+                <a:cs typeface="Consolas" panose="020B0609020204030204" pitchFamily="49" charset="0"/>
+              </a:rPr>
+              <a:t>12</a:t>
+            </a:r>
+          </a:p>
+        </p:txBody>
+      </p:sp>
+      <p:sp>
+        <p:nvSpPr>
+          <p:cNvPr id="4" name="TextBox 3">
+            <a:extLst>
+              <a:ext uri="{FF2B5EF4-FFF2-40B4-BE49-F238E27FC236}">
+                <a16:creationId xmlns:a16="http://schemas.microsoft.com/office/drawing/2014/main" id="{EE6973B7-F5BF-0887-DB0D-6275FE31A436}"/>
+              </a:ext>
+            </a:extLst>
+          </p:cNvPr>
+          <p:cNvSpPr txBox="1"/>
+          <p:nvPr/>
+        </p:nvSpPr>
+        <p:spPr>
+          <a:xfrm>
+            <a:off x="3553385" y="2221966"/>
+            <a:ext cx="1527982" cy="261610"/>
+          </a:xfrm>
+          <a:prstGeom prst="rect">
+            <a:avLst/>
+          </a:prstGeom>
+          <a:noFill/>
+        </p:spPr>
+        <p:txBody>
+          <a:bodyPr wrap="none" rtlCol="0">
+            <a:spAutoFit/>
+          </a:bodyPr>
+          <a:lstStyle/>
+          <a:p>
+            <a:r>
+              <a:rPr lang="en-CN" sz="1100" dirty="0"/>
+              <a:t>Syntax Rule Violation</a:t>
+            </a:r>
           </a:p>
         </p:txBody>
       </p:sp>
@@ -9723,6 +11877,27 @@
 </p:tagLst>
 </file>
 
+<file path=ppt/tags/tag64.xml><?xml version="1.0" encoding="utf-8"?>
+<p:tagLst xmlns:a="http://schemas.openxmlformats.org/drawingml/2006/main" xmlns:r="http://schemas.openxmlformats.org/officeDocument/2006/relationships" xmlns:p="http://schemas.openxmlformats.org/presentationml/2006/main">
+  <p:tag name="KSO_WM_SLIDE_ID" val="custom20205081_1"/>
+  <p:tag name="KSO_WM_TEMPLATE_SUBCATEGORY" val="19"/>
+  <p:tag name="KSO_WM_TEMPLATE_MASTER_TYPE" val="0"/>
+  <p:tag name="KSO_WM_TEMPLATE_COLOR_TYPE" val="1"/>
+  <p:tag name="KSO_WM_SLIDE_TYPE" val="title"/>
+  <p:tag name="KSO_WM_SLIDE_SUBTYPE" val="defaultBlank"/>
+  <p:tag name="KSO_WM_SLIDE_ITEM_CNT" val="0"/>
+  <p:tag name="KSO_WM_SLIDE_INDEX" val="1"/>
+  <p:tag name="KSO_WM_TAG_VERSION" val="1.0"/>
+  <p:tag name="KSO_WM_BEAUTIFY_FLAG" val="#wm#"/>
+  <p:tag name="KSO_WM_TEMPLATE_CATEGORY" val="custom"/>
+  <p:tag name="KSO_WM_TEMPLATE_INDEX" val="20205081"/>
+  <p:tag name="KSO_WM_SLIDE_LAYOUT" val="a_b"/>
+  <p:tag name="KSO_WM_SLIDE_LAYOUT_CNT" val="1_1"/>
+  <p:tag name="KSO_WM_UNIT_SHOW_EDIT_AREA_INDICATION" val="1"/>
+  <p:tag name="KSO_WM_TEMPLATE_THUMBS_INDEX" val="1、4、7、12、13、14、15、16、17、18、20、24、25、28、33、36、40、43、44"/>
+</p:tagLst>
+</file>
+
 <file path=ppt/tags/tag7.xml><?xml version="1.0" encoding="utf-8"?>
 <p:tagLst xmlns:a="http://schemas.openxmlformats.org/drawingml/2006/main" xmlns:r="http://schemas.openxmlformats.org/officeDocument/2006/relationships" xmlns:p="http://schemas.openxmlformats.org/presentationml/2006/main">
   <p:tag name="KSO_WM_UNIT_HIGHLIGHT" val="0"/>
@@ -9953,4 +12128,299 @@
     </a:ext>
   </a:extLst>
 </a:theme>
+</file>
+
+<file path=ppt/theme/theme2.xml><?xml version="1.0" encoding="utf-8"?>
+<a:theme xmlns:a="http://schemas.openxmlformats.org/drawingml/2006/main" name="Office Theme">
+  <a:themeElements>
+    <a:clrScheme name="Office">
+      <a:dk1>
+        <a:sysClr val="windowText" lastClr="000000"/>
+      </a:dk1>
+      <a:lt1>
+        <a:sysClr val="window" lastClr="FFFFFF"/>
+      </a:lt1>
+      <a:dk2>
+        <a:srgbClr val="44546A"/>
+      </a:dk2>
+      <a:lt2>
+        <a:srgbClr val="E7E6E6"/>
+      </a:lt2>
+      <a:accent1>
+        <a:srgbClr val="4472C4"/>
+      </a:accent1>
+      <a:accent2>
+        <a:srgbClr val="ED7D31"/>
+      </a:accent2>
+      <a:accent3>
+        <a:srgbClr val="A5A5A5"/>
+      </a:accent3>
+      <a:accent4>
+        <a:srgbClr val="FFC000"/>
+      </a:accent4>
+      <a:accent5>
+        <a:srgbClr val="5B9BD5"/>
+      </a:accent5>
+      <a:accent6>
+        <a:srgbClr val="70AD47"/>
+      </a:accent6>
+      <a:hlink>
+        <a:srgbClr val="0563C1"/>
+      </a:hlink>
+      <a:folHlink>
+        <a:srgbClr val="954F72"/>
+      </a:folHlink>
+    </a:clrScheme>
+    <a:fontScheme name="Office">
+      <a:majorFont>
+        <a:latin typeface="Calibri Light" panose="020F0302020204030204"/>
+        <a:ea typeface=""/>
+        <a:cs typeface=""/>
+        <a:font script="Jpan" typeface="游ゴシック Light"/>
+        <a:font script="Hang" typeface="맑은 고딕"/>
+        <a:font script="Hans" typeface="等线 Light"/>
+        <a:font script="Hant" typeface="新細明體"/>
+        <a:font script="Arab" typeface="Times New Roman"/>
+        <a:font script="Hebr" typeface="Times New Roman"/>
+        <a:font script="Thai" typeface="Angsana New"/>
+        <a:font script="Ethi" typeface="Nyala"/>
+        <a:font script="Beng" typeface="Vrinda"/>
+        <a:font script="Gujr" typeface="Shruti"/>
+        <a:font script="Khmr" typeface="MoolBoran"/>
+        <a:font script="Knda" typeface="Tunga"/>
+        <a:font script="Guru" typeface="Raavi"/>
+        <a:font script="Cans" typeface="Euphemia"/>
+        <a:font script="Cher" typeface="Plantagenet Cherokee"/>
+        <a:font script="Yiii" typeface="Microsoft Yi Baiti"/>
+        <a:font script="Tibt" typeface="Microsoft Himalaya"/>
+        <a:font script="Thaa" typeface="MV Boli"/>
+        <a:font script="Deva" typeface="Mangal"/>
+        <a:font script="Telu" typeface="Gautami"/>
+        <a:font script="Taml" typeface="Latha"/>
+        <a:font script="Syrc" typeface="Estrangelo Edessa"/>
+        <a:font script="Orya" typeface="Kalinga"/>
+        <a:font script="Mlym" typeface="Kartika"/>
+        <a:font script="Laoo" typeface="DokChampa"/>
+        <a:font script="Sinh" typeface="Iskoola Pota"/>
+        <a:font script="Mong" typeface="Mongolian Baiti"/>
+        <a:font script="Viet" typeface="Times New Roman"/>
+        <a:font script="Uigh" typeface="Microsoft Uighur"/>
+        <a:font script="Geor" typeface="Sylfaen"/>
+        <a:font script="Armn" typeface="Arial"/>
+        <a:font script="Bugi" typeface="Leelawadee UI"/>
+        <a:font script="Bopo" typeface="Microsoft JhengHei"/>
+        <a:font script="Java" typeface="Javanese Text"/>
+        <a:font script="Lisu" typeface="Segoe UI"/>
+        <a:font script="Mymr" typeface="Myanmar Text"/>
+        <a:font script="Nkoo" typeface="Ebrima"/>
+        <a:font script="Olck" typeface="Nirmala UI"/>
+        <a:font script="Osma" typeface="Ebrima"/>
+        <a:font script="Phag" typeface="Phagspa"/>
+        <a:font script="Syrn" typeface="Estrangelo Edessa"/>
+        <a:font script="Syrj" typeface="Estrangelo Edessa"/>
+        <a:font script="Syre" typeface="Estrangelo Edessa"/>
+        <a:font script="Sora" typeface="Nirmala UI"/>
+        <a:font script="Tale" typeface="Microsoft Tai Le"/>
+        <a:font script="Talu" typeface="Microsoft New Tai Lue"/>
+        <a:font script="Tfng" typeface="Ebrima"/>
+      </a:majorFont>
+      <a:minorFont>
+        <a:latin typeface="Calibri" panose="020F0502020204030204"/>
+        <a:ea typeface=""/>
+        <a:cs typeface=""/>
+        <a:font script="Jpan" typeface="游ゴシック"/>
+        <a:font script="Hang" typeface="맑은 고딕"/>
+        <a:font script="Hans" typeface="等线"/>
+        <a:font script="Hant" typeface="新細明體"/>
+        <a:font script="Arab" typeface="Arial"/>
+        <a:font script="Hebr" typeface="Arial"/>
+        <a:font script="Thai" typeface="Cordia New"/>
+        <a:font script="Ethi" typeface="Nyala"/>
+        <a:font script="Beng" typeface="Vrinda"/>
+        <a:font script="Gujr" typeface="Shruti"/>
+        <a:font script="Khmr" typeface="DaunPenh"/>
+        <a:font script="Knda" typeface="Tunga"/>
+        <a:font script="Guru" typeface="Raavi"/>
+        <a:font script="Cans" typeface="Euphemia"/>
+        <a:font script="Cher" typeface="Plantagenet Cherokee"/>
+        <a:font script="Yiii" typeface="Microsoft Yi Baiti"/>
+        <a:font script="Tibt" typeface="Microsoft Himalaya"/>
+        <a:font script="Thaa" typeface="MV Boli"/>
+        <a:font script="Deva" typeface="Mangal"/>
+        <a:font script="Telu" typeface="Gautami"/>
+        <a:font script="Taml" typeface="Latha"/>
+        <a:font script="Syrc" typeface="Estrangelo Edessa"/>
+        <a:font script="Orya" typeface="Kalinga"/>
+        <a:font script="Mlym" typeface="Kartika"/>
+        <a:font script="Laoo" typeface="DokChampa"/>
+        <a:font script="Sinh" typeface="Iskoola Pota"/>
+        <a:font script="Mong" typeface="Mongolian Baiti"/>
+        <a:font script="Viet" typeface="Arial"/>
+        <a:font script="Uigh" typeface="Microsoft Uighur"/>
+        <a:font script="Geor" typeface="Sylfaen"/>
+        <a:font script="Armn" typeface="Arial"/>
+        <a:font script="Bugi" typeface="Leelawadee UI"/>
+        <a:font script="Bopo" typeface="Microsoft JhengHei"/>
+        <a:font script="Java" typeface="Javanese Text"/>
+        <a:font script="Lisu" typeface="Segoe UI"/>
+        <a:font script="Mymr" typeface="Myanmar Text"/>
+        <a:font script="Nkoo" typeface="Ebrima"/>
+        <a:font script="Olck" typeface="Nirmala UI"/>
+        <a:font script="Osma" typeface="Ebrima"/>
+        <a:font script="Phag" typeface="Phagspa"/>
+        <a:font script="Syrn" typeface="Estrangelo Edessa"/>
+        <a:font script="Syrj" typeface="Estrangelo Edessa"/>
+        <a:font script="Syre" typeface="Estrangelo Edessa"/>
+        <a:font script="Sora" typeface="Nirmala UI"/>
+        <a:font script="Tale" typeface="Microsoft Tai Le"/>
+        <a:font script="Talu" typeface="Microsoft New Tai Lue"/>
+        <a:font script="Tfng" typeface="Ebrima"/>
+      </a:minorFont>
+    </a:fontScheme>
+    <a:fmtScheme name="Office">
+      <a:fillStyleLst>
+        <a:solidFill>
+          <a:schemeClr val="phClr"/>
+        </a:solidFill>
+        <a:gradFill rotWithShape="1">
+          <a:gsLst>
+            <a:gs pos="0">
+              <a:schemeClr val="phClr">
+                <a:lumMod val="110000"/>
+                <a:satMod val="105000"/>
+                <a:tint val="67000"/>
+              </a:schemeClr>
+            </a:gs>
+            <a:gs pos="50000">
+              <a:schemeClr val="phClr">
+                <a:lumMod val="105000"/>
+                <a:satMod val="103000"/>
+                <a:tint val="73000"/>
+              </a:schemeClr>
+            </a:gs>
+            <a:gs pos="100000">
+              <a:schemeClr val="phClr">
+                <a:lumMod val="105000"/>
+                <a:satMod val="109000"/>
+                <a:tint val="81000"/>
+              </a:schemeClr>
+            </a:gs>
+          </a:gsLst>
+          <a:lin ang="5400000" scaled="0"/>
+        </a:gradFill>
+        <a:gradFill rotWithShape="1">
+          <a:gsLst>
+            <a:gs pos="0">
+              <a:schemeClr val="phClr">
+                <a:satMod val="103000"/>
+                <a:lumMod val="102000"/>
+                <a:tint val="94000"/>
+              </a:schemeClr>
+            </a:gs>
+            <a:gs pos="50000">
+              <a:schemeClr val="phClr">
+                <a:satMod val="110000"/>
+                <a:lumMod val="100000"/>
+                <a:shade val="100000"/>
+              </a:schemeClr>
+            </a:gs>
+            <a:gs pos="100000">
+              <a:schemeClr val="phClr">
+                <a:lumMod val="99000"/>
+                <a:satMod val="120000"/>
+                <a:shade val="78000"/>
+              </a:schemeClr>
+            </a:gs>
+          </a:gsLst>
+          <a:lin ang="5400000" scaled="0"/>
+        </a:gradFill>
+      </a:fillStyleLst>
+      <a:lnStyleLst>
+        <a:ln w="6350" cap="flat" cmpd="sng" algn="ctr">
+          <a:solidFill>
+            <a:schemeClr val="phClr"/>
+          </a:solidFill>
+          <a:prstDash val="solid"/>
+          <a:miter lim="800000"/>
+        </a:ln>
+        <a:ln w="12700" cap="flat" cmpd="sng" algn="ctr">
+          <a:solidFill>
+            <a:schemeClr val="phClr"/>
+          </a:solidFill>
+          <a:prstDash val="solid"/>
+          <a:miter lim="800000"/>
+        </a:ln>
+        <a:ln w="19050" cap="flat" cmpd="sng" algn="ctr">
+          <a:solidFill>
+            <a:schemeClr val="phClr"/>
+          </a:solidFill>
+          <a:prstDash val="solid"/>
+          <a:miter lim="800000"/>
+        </a:ln>
+      </a:lnStyleLst>
+      <a:effectStyleLst>
+        <a:effectStyle>
+          <a:effectLst/>
+        </a:effectStyle>
+        <a:effectStyle>
+          <a:effectLst/>
+        </a:effectStyle>
+        <a:effectStyle>
+          <a:effectLst>
+            <a:outerShdw blurRad="57150" dist="19050" dir="5400000" algn="ctr" rotWithShape="0">
+              <a:srgbClr val="000000">
+                <a:alpha val="63000"/>
+              </a:srgbClr>
+            </a:outerShdw>
+          </a:effectLst>
+        </a:effectStyle>
+      </a:effectStyleLst>
+      <a:bgFillStyleLst>
+        <a:solidFill>
+          <a:schemeClr val="phClr"/>
+        </a:solidFill>
+        <a:solidFill>
+          <a:schemeClr val="phClr">
+            <a:tint val="95000"/>
+            <a:satMod val="170000"/>
+          </a:schemeClr>
+        </a:solidFill>
+        <a:gradFill rotWithShape="1">
+          <a:gsLst>
+            <a:gs pos="0">
+              <a:schemeClr val="phClr">
+                <a:tint val="93000"/>
+                <a:satMod val="150000"/>
+                <a:shade val="98000"/>
+                <a:lumMod val="102000"/>
+              </a:schemeClr>
+            </a:gs>
+            <a:gs pos="50000">
+              <a:schemeClr val="phClr">
+                <a:tint val="98000"/>
+                <a:satMod val="130000"/>
+                <a:shade val="90000"/>
+                <a:lumMod val="103000"/>
+              </a:schemeClr>
+            </a:gs>
+            <a:gs pos="100000">
+              <a:schemeClr val="phClr">
+                <a:shade val="63000"/>
+                <a:satMod val="120000"/>
+              </a:schemeClr>
+            </a:gs>
+          </a:gsLst>
+          <a:lin ang="5400000" scaled="0"/>
+        </a:gradFill>
+      </a:bgFillStyleLst>
+    </a:fmtScheme>
+  </a:themeElements>
+  <a:objectDefaults/>
+  <a:extraClrSchemeLst/>
+  <a:extLst>
+    <a:ext uri="{05A4C25C-085E-4340-85A3-A5531E510DB2}">
+      <thm15:themeFamily xmlns:thm15="http://schemas.microsoft.com/office/thememl/2012/main" name="Office Theme" id="{62F939B6-93AF-4DB8-9C6B-D6C7DFDC589F}" vid="{4A3C46E8-61CC-4603-A589-7422A47A8E4A}"/>
+    </a:ext>
+  </a:extLst>
+</a:theme>
 </file>